--- a/outputs/produkte/mama-ceo/03-praesentationen/saeule-2/03-lektion-2-3.pptx
+++ b/outputs/produkte/mama-ceo/03-praesentationen/saeule-2/03-lektion-2-3.pptx
@@ -4,6 +4,9 @@
   <p:sldMasterIdLst>
     <p:sldMasterId id="2147483648" r:id="rId1"/>
   </p:sldMasterIdLst>
+  <p:notesMasterIdLst>
+    <p:notesMasterId r:id="rId16"/>
+  </p:notesMasterIdLst>
   <p:sldIdLst>
     <p:sldId id="256" r:id="rId2"/>
     <p:sldId id="257" r:id="rId3"/>
@@ -20,10 +23,7 @@
     <p:sldId id="268" r:id="rId14"/>
     <p:sldId id="269" r:id="rId15"/>
   </p:sldIdLst>
-  <p:notesMasterIdLst>
-    <p:notesMasterId r:id="rId16"/>
-  </p:notesMasterIdLst>
-  <p:sldSz cx="9144000" cy="5143500"/>
+  <p:sldSz cx="9144000" cy="5143500" type="screen16x9"/>
   <p:notesSz cx="5143500" cy="9144000"/>
   <p:defaultTextStyle>
     <a:lvl1pPr marL="0" algn="l" defTabSz="914400" rtl="0" eaLnBrk="1" latinLnBrk="0" hangingPunct="1">
@@ -117,6 +117,11 @@
       </a:defRPr>
     </a:lvl9pPr>
   </p:defaultTextStyle>
+  <p:extLst>
+    <p:ext uri="{EFAFB233-063F-42B5-8137-9DF3F51BA10A}">
+      <p15:sldGuideLst xmlns:p15="http://schemas.microsoft.com/office/powerpoint/2012/main"/>
+    </p:ext>
+  </p:extLst>
 </p:presentation>
 </file>
 
@@ -142,234 +147,10 @@
           <a:chExt cx="0" cy="0"/>
         </a:xfrm>
       </p:grpSpPr>
-      <p:sp>
-        <p:nvSpPr>
-          <p:cNvPr id="2" name="Header Placeholder 1"/>
-          <p:cNvSpPr>
-            <a:spLocks noGrp="1"/>
-          </p:cNvSpPr>
-          <p:nvPr>
-            <p:ph type="hdr" sz="quarter"/>
-          </p:nvPr>
-        </p:nvSpPr>
-        <p:spPr>
-          <a:xfrm>
-            <a:off x="0" y="0"/>
-            <a:ext cx="2971800" cy="458788"/>
-          </a:xfrm>
-          <a:prstGeom prst="rect">
-            <a:avLst/>
-          </a:prstGeom>
-        </p:spPr>
-        <p:txBody>
-          <a:bodyPr vert="horz" lIns="91440" tIns="45720" rIns="91440" bIns="45720" rtlCol="0"/>
-          <a:lstStyle>
-            <a:lvl1pPr algn="l">
-              <a:defRPr sz="1200"/>
-            </a:lvl1pPr>
-          </a:lstStyle>
-          <a:p>
-            <a:endParaRPr lang="en-US"/>
-          </a:p>
-        </p:txBody>
-      </p:sp>
-      <p:sp>
-        <p:nvSpPr>
-          <p:cNvPr id="3" name="Date Placeholder 2"/>
-          <p:cNvSpPr>
-            <a:spLocks noGrp="1"/>
-          </p:cNvSpPr>
-          <p:nvPr>
-            <p:ph type="dt" idx="1"/>
-          </p:nvPr>
-        </p:nvSpPr>
-        <p:spPr>
-          <a:xfrm>
-            <a:off x="3884613" y="0"/>
-            <a:ext cx="2971800" cy="458788"/>
-          </a:xfrm>
-          <a:prstGeom prst="rect">
-            <a:avLst/>
-          </a:prstGeom>
-        </p:spPr>
-        <p:txBody>
-          <a:bodyPr vert="horz" lIns="91440" tIns="45720" rIns="91440" bIns="45720" rtlCol="0"/>
-          <a:lstStyle>
-            <a:lvl1pPr algn="r">
-              <a:defRPr sz="1200"/>
-            </a:lvl1pPr>
-          </a:lstStyle>
-          <a:p>
-            <a:fld id="{5282F153-3F37-0F45-9E97-73ACFA13230C}" type="datetimeFigureOut">
-              <a:rPr lang="en-US"/>
-              <a:t>7/23/19</a:t>
-            </a:fld>
-            <a:endParaRPr lang="en-US"/>
-          </a:p>
-        </p:txBody>
-      </p:sp>
-      <p:sp>
-        <p:nvSpPr>
-          <p:cNvPr id="4" name="Slide Image Placeholder 3"/>
-          <p:cNvSpPr>
-            <a:spLocks noGrp="1" noRot="1" noChangeAspect="1"/>
-          </p:cNvSpPr>
-          <p:nvPr>
-            <p:ph type="sldImg" idx="2"/>
-          </p:nvPr>
-        </p:nvSpPr>
-        <p:spPr>
-          <a:xfrm>
-            <a:off x="685800" y="1143000"/>
-            <a:ext cx="5486400" cy="3086100"/>
-          </a:xfrm>
-          <a:prstGeom prst="rect">
-            <a:avLst/>
-          </a:prstGeom>
-          <a:noFill/>
-          <a:ln w="12700">
-            <a:solidFill>
-              <a:prstClr val="black"/>
-            </a:solidFill>
-          </a:ln>
-        </p:spPr>
-        <p:txBody>
-          <a:bodyPr vert="horz" lIns="91440" tIns="45720" rIns="91440" bIns="45720" rtlCol="0" anchor="ctr"/>
-          <a:lstStyle/>
-          <a:p>
-            <a:endParaRPr lang="en-US"/>
-          </a:p>
-        </p:txBody>
-      </p:sp>
-      <p:sp>
-        <p:nvSpPr>
-          <p:cNvPr id="5" name="Notes Placeholder 4"/>
-          <p:cNvSpPr>
-            <a:spLocks noGrp="1"/>
-          </p:cNvSpPr>
-          <p:nvPr>
-            <p:ph type="body" sz="quarter" idx="3"/>
-          </p:nvPr>
-        </p:nvSpPr>
-        <p:spPr>
-          <a:xfrm>
-            <a:off x="685800" y="4400550"/>
-            <a:ext cx="5486400" cy="3600450"/>
-          </a:xfrm>
-          <a:prstGeom prst="rect">
-            <a:avLst/>
-          </a:prstGeom>
-        </p:spPr>
-        <p:txBody>
-          <a:bodyPr vert="horz" lIns="91440" tIns="45720" rIns="91440" bIns="45720" rtlCol="0"/>
-          <a:lstStyle/>
-          <a:p>
-            <a:pPr lvl="0"/>
-            <a:r>
-              <a:rPr lang="en-US"/>
-              <a:t>Click to edit Master text styles</a:t>
-            </a:r>
-          </a:p>
-          <a:p>
-            <a:pPr lvl="1"/>
-            <a:r>
-              <a:rPr lang="en-US"/>
-              <a:t>Second level</a:t>
-            </a:r>
-          </a:p>
-          <a:p>
-            <a:pPr lvl="2"/>
-            <a:r>
-              <a:rPr lang="en-US"/>
-              <a:t>Third level</a:t>
-            </a:r>
-          </a:p>
-          <a:p>
-            <a:pPr lvl="3"/>
-            <a:r>
-              <a:rPr lang="en-US"/>
-              <a:t>Fourth level</a:t>
-            </a:r>
-          </a:p>
-          <a:p>
-            <a:pPr lvl="4"/>
-            <a:r>
-              <a:rPr lang="en-US"/>
-              <a:t>Fifth level</a:t>
-            </a:r>
-          </a:p>
-        </p:txBody>
-      </p:sp>
-      <p:sp>
-        <p:nvSpPr>
-          <p:cNvPr id="6" name="Footer Placeholder 5"/>
-          <p:cNvSpPr>
-            <a:spLocks noGrp="1"/>
-          </p:cNvSpPr>
-          <p:nvPr>
-            <p:ph type="ftr" sz="quarter" idx="4"/>
-          </p:nvPr>
-        </p:nvSpPr>
-        <p:spPr>
-          <a:xfrm>
-            <a:off x="0" y="8685213"/>
-            <a:ext cx="2971800" cy="458787"/>
-          </a:xfrm>
-          <a:prstGeom prst="rect">
-            <a:avLst/>
-          </a:prstGeom>
-        </p:spPr>
-        <p:txBody>
-          <a:bodyPr vert="horz" lIns="91440" tIns="45720" rIns="91440" bIns="45720" rtlCol="0" anchor="b"/>
-          <a:lstStyle>
-            <a:lvl1pPr algn="l">
-              <a:defRPr sz="1200"/>
-            </a:lvl1pPr>
-          </a:lstStyle>
-          <a:p>
-            <a:endParaRPr lang="en-US"/>
-          </a:p>
-        </p:txBody>
-      </p:sp>
-      <p:sp>
-        <p:nvSpPr>
-          <p:cNvPr id="7" name="Slide Number Placeholder 6"/>
-          <p:cNvSpPr>
-            <a:spLocks noGrp="1"/>
-          </p:cNvSpPr>
-          <p:nvPr>
-            <p:ph type="sldNum" sz="quarter" idx="5"/>
-          </p:nvPr>
-        </p:nvSpPr>
-        <p:spPr>
-          <a:xfrm>
-            <a:off x="3884613" y="8685213"/>
-            <a:ext cx="2971800" cy="458787"/>
-          </a:xfrm>
-          <a:prstGeom prst="rect">
-            <a:avLst/>
-          </a:prstGeom>
-        </p:spPr>
-        <p:txBody>
-          <a:bodyPr vert="horz" lIns="91440" tIns="45720" rIns="91440" bIns="45720" rtlCol="0" anchor="b"/>
-          <a:lstStyle>
-            <a:lvl1pPr algn="r">
-              <a:defRPr sz="1200"/>
-            </a:lvl1pPr>
-          </a:lstStyle>
-          <a:p>
-            <a:fld id="{CE5E9CC1-C706-0F49-92D6-E571CC5EEA8F}" type="slidenum">
-              <a:rPr lang="en-US"/>
-              <a:t>‹#›</a:t>
-            </a:fld>
-            <a:endParaRPr lang="en-US"/>
-          </a:p>
-        </p:txBody>
-      </p:sp>
     </p:spTree>
     <p:extLst>
       <p:ext uri="{BB962C8B-B14F-4D97-AF65-F5344CB8AC3E}">
-        <p14:creationId xmlns:p14="http://schemas.microsoft.com/office/powerpoint/2010/main" val="1024086991"/>
+        <p14:creationId xmlns:p14="http://schemas.microsoft.com/office/powerpoint/2010/main" val="3793944"/>
       </p:ext>
     </p:extLst>
   </p:cSld>
@@ -518,7 +299,6 @@
               <a:t>Intro:
 „Willkommen zur wichtigsten Lektion im Programm. Wenn du heute nur EINE Lektion machst, dann diese. Ich entwickelte die Hütchenmethode in meinem Mama Balance Meisterkurs vor 2 Jahren — und sie verändert jedes Mal wieder das Spiel."</a:t>
             </a:r>
-            <a:endParaRPr lang="en-US" dirty="0"/>
           </a:p>
         </p:txBody>
       </p:sp>
@@ -607,7 +387,6 @@
               <a:t>Sprechnotiz:
 „Warum 7? Forschung zeigt: ab mehr als 7 gleichzeitig getragenen Rollen sinkt deine Lebenszufriedenheit messbar. Bei 12+ Rollen bist du im chronischen Stress. 7 ist das Maximum für ein Leben das sich nicht überlastet anfühlt."</a:t>
             </a:r>
-            <a:endParaRPr lang="en-US" dirty="0"/>
           </a:p>
         </p:txBody>
       </p:sp>
@@ -696,7 +475,6 @@
               <a:t>Sprechnotiz:
 „Die Angst beim Loslassen: ‚dann sind alle sauer auf mich'. Realität: meistens passieren 3 Dinge. Erstens: du fühlst Erleichterung. Zweitens: kurzer Schreck bei den Anderen. Drittens: nach 2 Wochen merkt's niemand mehr. Probier's aus."</a:t>
             </a:r>
-            <a:endParaRPr lang="en-US" dirty="0"/>
           </a:p>
         </p:txBody>
       </p:sp>
@@ -785,7 +563,6 @@
               <a:t>Sprechnotiz:
 „Trag jetzt deine 7 verbleibenden Hüte auf das Hauptfeld in deinem Arbeitsblatt ein. Die sind ab jetzt deine Rollen. Wenn jemand fragt: ‚übernimmst du Rolle X?' und Rolle X passt zu keiner deiner 7 — dann ist die Antwort Nein. Höflich, aber klar."</a:t>
             </a:r>
-            <a:endParaRPr lang="en-US" dirty="0"/>
           </a:p>
         </p:txBody>
       </p:sp>
@@ -874,7 +651,6 @@
               <a:t>Outro:
 „Im Arbeitsblatt: das vollständige Hütchen-Inventar — bewertet, kategorisiert, reduziert. Plus oben drauf deine 7 Hauptrollen. Bring das zum Live-Call 1."</a:t>
             </a:r>
-            <a:endParaRPr lang="en-US" dirty="0"/>
           </a:p>
         </p:txBody>
       </p:sp>
@@ -963,7 +739,6 @@
               <a:t>Sprechnotiz:
 „In der nächsten Lektion gehen wir die losgelassenen Hüte durch und entscheiden pro Aufgabe darin: behalten · delegieren · automatisieren · aufhören. Bis dann."</a:t>
             </a:r>
-            <a:endParaRPr lang="en-US" dirty="0"/>
           </a:p>
         </p:txBody>
       </p:sp>
@@ -1052,7 +827,6 @@
               <a:t>Sprechnotiz:
 „Jede Rolle die du in deinem Leben trägst, ist ein Hut. Mama ist ein Hut. Frau ist ein Hut. Tochter, Schwester, Freundin, Vereinsmitglied, Networkerin, Unternehmerin, Hausfrau, Sportlerin, Hobbygärtnerin — alles eigene Hüte. Du trägst sie nicht alle gleichzeitig. Du wechselst."</a:t>
             </a:r>
-            <a:endParaRPr lang="en-US" dirty="0"/>
           </a:p>
         </p:txBody>
       </p:sp>
@@ -1141,7 +915,6 @@
               <a:t>Sprechnotiz:
 „Das Problem: die meisten Mamas tragen 12 bis 18 Hüte gleichzeitig — und merken's gar nicht. Jeder einzelne Hut ist eine mentale Last. Auch wenn du gerade nicht in der Rolle bist, ist der Hut präsent. Das ist Mental Load."</a:t>
             </a:r>
-            <a:endParaRPr lang="en-US" dirty="0"/>
           </a:p>
         </p:txBody>
       </p:sp>
@@ -1230,7 +1003,6 @@
               <a:t>Sprechnotiz:
 „Vier Schritte. Erstens: alle Hüte AUFLISTEN — ehrlich. Zweitens: jeden Hut BEWERTEN — angenehm, unangenehm, neutral. Drittens: jeden Hut einer KATEGORIE zuordnen — automatisch, aus Pflicht, unwichtig, auf Zeit, Hobby. Viertens: REDUZIEREN auf maximal 7. Mehr trägst du nicht ohne Burnout."</a:t>
             </a:r>
-            <a:endParaRPr lang="en-US" dirty="0"/>
           </a:p>
         </p:txBody>
       </p:sp>
@@ -1319,7 +1091,6 @@
               <a:t>Sprechnotiz:
 „Wir starten mit dem 16-Felder-Raster aus deinem Arbeitsblatt. 16 Felder — füll sie. Wenn du weniger als 16 Rollen hast, super. Falls mehr — dann notiere die weiteren auf der Rückseite. Aber meistens passen die 12-18 echten Rollen ins Raster. Geh durch deinen Alltag: morgens als Mama, vormittags als Unternehmerin, mittags als Hausfrau, nachmittags als Mama, abends als Frau, dazwischen Tochter wenn deine Mutter anruft, am Mittwochabend Vereinsmitglied wenn du zum Chor gehst..."</a:t>
             </a:r>
-            <a:endParaRPr lang="en-US" dirty="0"/>
           </a:p>
         </p:txBody>
       </p:sp>
@@ -1408,7 +1179,6 @@
               <a:t>Sprechnotiz:
 „Hier 16 typische Mama-Hüte zur Inspiration — aber nimm DEINE. Vielleicht hast du ‚Reitlehrerin für meine Tochter' oder ‚Hauptverantwortliche für die Pflege der Schwiegermutter' oder ‚Buchhalterin im Family Trust'. Alles zählt."</a:t>
             </a:r>
-            <a:endParaRPr lang="en-US" dirty="0"/>
           </a:p>
         </p:txBody>
       </p:sp>
@@ -1497,7 +1267,6 @@
               <a:t>Sprechnotiz:
 „Schritt zwei: gehe jeden Hut durch. Mach ein Plus wenn diese Rolle dir Freude macht und Energie gibt. Minus wenn sie dich auslaugt und du sie eigentlich nicht willst. Gleichheits-Zeichen wenn sie neutral ist — du machst's, aber ohne grossen Energie-Effekt."</a:t>
             </a:r>
-            <a:endParaRPr lang="en-US" dirty="0"/>
           </a:p>
         </p:txBody>
       </p:sp>
@@ -1586,7 +1355,6 @@
               <a:t>Sprechnotiz:
 „Schritt drei: jede Rolle bekommt eine Kategorie. Erstens: AUTOMATISCHE Rolle — die ist da weil du Mama bist, Frau bist, Mensch bist. Geht nicht weg. Zweitens: PFLICHTBEWUSSTSEIN — du fühlst dich verpflichtet, willst aber eigentlich nicht. Drittens: UNWICHTIGE NEBENROLLE — kostet Zeit, bringt wenig. Viertens: ROLLE AUF ZEIT — vorübergehend (z.B. Pflege während Krankheit). Fünftens: HOBBY — du machst's aus Liebe. Wichtig: Kategorie ehrlich, nicht ‚wie es sich gehört'."</a:t>
             </a:r>
-            <a:endParaRPr lang="en-US" dirty="0"/>
           </a:p>
         </p:txBody>
       </p:sp>
@@ -1675,7 +1443,6 @@
               <a:t>Sprechnotiz:
 „Schritt vier: REDUZIERE auf maximal 7. Welche kannst du LOSLASSEN? Kandidaten zum Loslassen: alle aus ‚Pflichtbewusstsein' (Frage dich: was passiert wirklich wenn ich Nein sage?) und alle aus ‚unwichtige Nebenrolle'. ‚Rolle auf Zeit' bleibt nur so lange wie nötig. Hobbys: 1-2 bewusst gewählte."</a:t>
             </a:r>
-            <a:endParaRPr lang="en-US" dirty="0"/>
           </a:p>
         </p:txBody>
       </p:sp>
@@ -1748,6 +1515,11 @@
 <file path=ppt/slideMasters/slideMaster1.xml><?xml version="1.0" encoding="utf-8"?>
 <p:sldMaster xmlns:a="http://schemas.openxmlformats.org/drawingml/2006/main" xmlns:r="http://schemas.openxmlformats.org/officeDocument/2006/relationships" xmlns:p="http://schemas.openxmlformats.org/presentationml/2006/main">
   <p:cSld>
+    <p:bg>
+      <p:bgRef idx="1001">
+        <a:schemeClr val="bg1"/>
+      </p:bgRef>
+    </p:bg>
     <p:spTree>
       <p:nvGrpSpPr>
         <p:cNvPr id="1" name=""/>
@@ -2030,6 +1802,7 @@
         <a:solidFill>
           <a:srgbClr val="F1ECDD"/>
         </a:solidFill>
+        <a:effectLst/>
       </p:bgPr>
     </p:bg>
     <p:spTree>
@@ -2074,6 +1847,13 @@
             <a:prstDash val="solid"/>
           </a:ln>
         </p:spPr>
+        <p:txBody>
+          <a:bodyPr/>
+          <a:lstStyle/>
+          <a:p>
+            <a:endParaRPr lang="de-CH"/>
+          </a:p>
+        </p:txBody>
       </p:sp>
       <p:sp>
         <p:nvSpPr>
@@ -2096,11 +1876,11 @@
           <a:bodyPr wrap="square" rtlCol="0" anchor="ctr"/>
           <a:lstStyle/>
           <a:p>
-            <a:pPr indent="0" marL="0">
-              <a:buNone/>
-            </a:pPr>
-            <a:r>
-              <a:rPr lang="en-US" sz="1100" b="1" spc="400" kern="0" dirty="0">
+            <a:pPr marL="0" indent="0">
+              <a:buNone/>
+            </a:pPr>
+            <a:r>
+              <a:rPr lang="en-US" sz="1100" b="1" kern="0" spc="400" dirty="0">
                 <a:solidFill>
                   <a:srgbClr val="DC822E"/>
                 </a:solidFill>
@@ -2140,6 +1920,13 @@
             <a:prstDash val="solid"/>
           </a:ln>
         </p:spPr>
+        <p:txBody>
+          <a:bodyPr/>
+          <a:lstStyle/>
+          <a:p>
+            <a:endParaRPr lang="de-CH"/>
+          </a:p>
+        </p:txBody>
       </p:sp>
       <p:sp>
         <p:nvSpPr>
@@ -2162,7 +1949,7 @@
           <a:bodyPr wrap="square" lIns="0" tIns="0" rIns="0" bIns="0" rtlCol="0" anchor="t"/>
           <a:lstStyle/>
           <a:p>
-            <a:pPr indent="0" marL="0">
+            <a:pPr marL="0" indent="0">
               <a:buNone/>
             </a:pPr>
             <a:r>
@@ -2201,7 +1988,7 @@
           <a:bodyPr wrap="square" lIns="0" tIns="0" rIns="0" bIns="0" rtlCol="0" anchor="t"/>
           <a:lstStyle/>
           <a:p>
-            <a:pPr indent="0" marL="0">
+            <a:pPr marL="0" indent="0">
               <a:buNone/>
             </a:pPr>
             <a:r>
@@ -2218,7 +2005,7 @@
             <a:endParaRPr lang="en-US" sz="1800" dirty="0"/>
           </a:p>
           <a:p>
-            <a:pPr indent="0" marL="0">
+            <a:pPr marL="0" indent="0">
               <a:buNone/>
             </a:pPr>
             <a:r>
@@ -2235,7 +2022,7 @@
             <a:endParaRPr lang="en-US" sz="1800" dirty="0"/>
           </a:p>
           <a:p>
-            <a:pPr indent="0" marL="0">
+            <a:pPr marL="0" indent="0">
               <a:buNone/>
             </a:pPr>
             <a:r>
@@ -2274,7 +2061,7 @@
           <a:bodyPr wrap="square" rtlCol="0" anchor="ctr"/>
           <a:lstStyle/>
           <a:p>
-            <a:pPr indent="0" marL="0">
+            <a:pPr marL="0" indent="0">
               <a:buNone/>
             </a:pPr>
             <a:r>
@@ -2313,7 +2100,7 @@
           <a:bodyPr wrap="square" rtlCol="0" anchor="ctr"/>
           <a:lstStyle/>
           <a:p>
-            <a:pPr algn="r" indent="0" marL="0">
+            <a:pPr marL="0" indent="0" algn="r">
               <a:buNone/>
             </a:pPr>
             <a:r>
@@ -2347,6 +2134,7 @@
         <a:solidFill>
           <a:srgbClr val="12828C"/>
         </a:solidFill>
+        <a:effectLst/>
       </p:bgPr>
     </p:bg>
     <p:spTree>
@@ -2371,7 +2159,7 @@
         </p:nvSpPr>
         <p:spPr>
           <a:xfrm>
-            <a:off x="548640" y="1188720"/>
+            <a:off x="548640" y="348826"/>
             <a:ext cx="8046720" cy="365760"/>
           </a:xfrm>
           <a:prstGeom prst="rect">
@@ -2384,11 +2172,11 @@
           <a:bodyPr wrap="square" rtlCol="0" anchor="ctr"/>
           <a:lstStyle/>
           <a:p>
-            <a:pPr algn="ctr" indent="0" marL="0">
-              <a:buNone/>
-            </a:pPr>
-            <a:r>
-              <a:rPr lang="en-US" sz="1100" b="1" spc="400" kern="0" dirty="0">
+            <a:pPr marL="0" indent="0" algn="ctr">
+              <a:buNone/>
+            </a:pPr>
+            <a:r>
+              <a:rPr lang="en-US" sz="1100" b="1" kern="0" spc="400" dirty="0">
                 <a:solidFill>
                   <a:srgbClr val="DC822E"/>
                 </a:solidFill>
@@ -2410,7 +2198,7 @@
         </p:nvSpPr>
         <p:spPr>
           <a:xfrm>
-            <a:off x="4297680" y="1691640"/>
+            <a:off x="4297680" y="696298"/>
             <a:ext cx="548640" cy="36576"/>
           </a:xfrm>
           <a:prstGeom prst="rect">
@@ -2428,6 +2216,13 @@
             <a:prstDash val="solid"/>
           </a:ln>
         </p:spPr>
+        <p:txBody>
+          <a:bodyPr/>
+          <a:lstStyle/>
+          <a:p>
+            <a:endParaRPr lang="de-CH"/>
+          </a:p>
+        </p:txBody>
       </p:sp>
       <p:sp>
         <p:nvSpPr>
@@ -2450,11 +2245,11 @@
           <a:bodyPr wrap="square" lIns="0" tIns="0" rIns="0" bIns="0" rtlCol="0" anchor="ctr"/>
           <a:lstStyle/>
           <a:p>
-            <a:pPr algn="ctr" indent="0" marL="0">
-              <a:buNone/>
-            </a:pPr>
-            <a:r>
-              <a:rPr lang="en-US" sz="3600" b="1" dirty="0">
+            <a:pPr marL="0" indent="0" algn="ctr">
+              <a:buNone/>
+            </a:pPr>
+            <a:r>
+              <a:rPr lang="en-US" sz="2800" b="1" dirty="0">
                 <a:solidFill>
                   <a:srgbClr val="F1ECDD"/>
                 </a:solidFill>
@@ -2462,16 +2257,10 @@
                 <a:ea typeface="Georgia" pitchFamily="34" charset="-122"/>
                 <a:cs typeface="Georgia" pitchFamily="34" charset="-120"/>
               </a:rPr>
-              <a:t>Ab mehr als 7 gleichzeitig getragenen Rollen</a:t>
-            </a:r>
-            <a:endParaRPr lang="en-US" sz="3600" dirty="0"/>
-          </a:p>
-          <a:p>
-            <a:pPr algn="ctr" indent="0" marL="0">
-              <a:buNone/>
-            </a:pPr>
-            <a:r>
-              <a:rPr lang="en-US" sz="3600" b="1" dirty="0">
+              <a:t>Ab mehr als 7 gleichzeitig </a:t>
+            </a:r>
+            <a:r>
+              <a:rPr lang="en-US" sz="2800" b="1" dirty="0" err="1">
                 <a:solidFill>
                   <a:srgbClr val="F1ECDD"/>
                 </a:solidFill>
@@ -2479,16 +2268,10 @@
                 <a:ea typeface="Georgia" pitchFamily="34" charset="-122"/>
                 <a:cs typeface="Georgia" pitchFamily="34" charset="-120"/>
               </a:rPr>
-              <a:t>sinkt deine Lebenszufriedenheit messbar.</a:t>
-            </a:r>
-            <a:endParaRPr lang="en-US" sz="3600" dirty="0"/>
-          </a:p>
-          <a:p>
-            <a:pPr algn="ctr" indent="0" marL="0">
-              <a:buNone/>
-            </a:pPr>
-            <a:r>
-              <a:rPr lang="en-US" sz="3600" b="1" dirty="0">
+              <a:t>getragenen</a:t>
+            </a:r>
+            <a:r>
+              <a:rPr lang="en-US" sz="2800" b="1" dirty="0">
                 <a:solidFill>
                   <a:srgbClr val="F1ECDD"/>
                 </a:solidFill>
@@ -2496,16 +2279,14 @@
                 <a:ea typeface="Georgia" pitchFamily="34" charset="-122"/>
                 <a:cs typeface="Georgia" pitchFamily="34" charset="-120"/>
               </a:rPr>
-              <a:t>Bei 12+ bist du im chronischen Stress.</a:t>
-            </a:r>
-            <a:endParaRPr lang="en-US" sz="3600" dirty="0"/>
-          </a:p>
-          <a:p>
-            <a:pPr algn="ctr" indent="0" marL="0">
-              <a:buNone/>
-            </a:pPr>
-            <a:r>
-              <a:rPr lang="en-US" sz="3600" b="1" dirty="0">
+              <a:t> Rollen</a:t>
+            </a:r>
+            <a:r>
+              <a:rPr lang="en-US" sz="2800" dirty="0"/>
+              <a:t> </a:t>
+            </a:r>
+            <a:r>
+              <a:rPr lang="en-US" sz="2800" b="1" dirty="0" err="1">
                 <a:solidFill>
                   <a:srgbClr val="F1ECDD"/>
                 </a:solidFill>
@@ -2513,9 +2294,54 @@
                 <a:ea typeface="Georgia" pitchFamily="34" charset="-122"/>
                 <a:cs typeface="Georgia" pitchFamily="34" charset="-120"/>
               </a:rPr>
+              <a:t>sinkt</a:t>
+            </a:r>
+            <a:r>
+              <a:rPr lang="en-US" sz="2800" b="1" dirty="0">
+                <a:solidFill>
+                  <a:srgbClr val="F1ECDD"/>
+                </a:solidFill>
+                <a:latin typeface="Georgia" pitchFamily="34" charset="0"/>
+                <a:ea typeface="Georgia" pitchFamily="34" charset="-122"/>
+                <a:cs typeface="Georgia" pitchFamily="34" charset="-120"/>
+              </a:rPr>
+              <a:t> deine Lebenszufriedenheit messbar.</a:t>
+            </a:r>
+            <a:endParaRPr lang="en-US" sz="2800" dirty="0"/>
+          </a:p>
+          <a:p>
+            <a:pPr marL="0" indent="0" algn="ctr">
+              <a:buNone/>
+            </a:pPr>
+            <a:r>
+              <a:rPr lang="en-US" sz="2800" b="1" dirty="0">
+                <a:solidFill>
+                  <a:srgbClr val="F1ECDD"/>
+                </a:solidFill>
+                <a:latin typeface="Georgia" pitchFamily="34" charset="0"/>
+                <a:ea typeface="Georgia" pitchFamily="34" charset="-122"/>
+                <a:cs typeface="Georgia" pitchFamily="34" charset="-120"/>
+              </a:rPr>
+              <a:t>Bei 12+ bist du im chronischen Stress.</a:t>
+            </a:r>
+            <a:endParaRPr lang="en-US" sz="2800" dirty="0"/>
+          </a:p>
+          <a:p>
+            <a:pPr marL="0" indent="0" algn="ctr">
+              <a:buNone/>
+            </a:pPr>
+            <a:r>
+              <a:rPr lang="en-US" sz="2800" b="1" dirty="0">
+                <a:solidFill>
+                  <a:srgbClr val="F1ECDD"/>
+                </a:solidFill>
+                <a:latin typeface="Georgia" pitchFamily="34" charset="0"/>
+                <a:ea typeface="Georgia" pitchFamily="34" charset="-122"/>
+                <a:cs typeface="Georgia" pitchFamily="34" charset="-120"/>
+              </a:rPr>
               <a:t>7 ist das Maximum für ein Leben das sich nicht überlastet anfühlt.</a:t>
             </a:r>
-            <a:endParaRPr lang="en-US" sz="3600" dirty="0"/>
+            <a:endParaRPr lang="en-US" sz="2800" dirty="0"/>
           </a:p>
         </p:txBody>
       </p:sp>
@@ -2540,11 +2366,11 @@
           <a:bodyPr wrap="square" rtlCol="0" anchor="ctr"/>
           <a:lstStyle/>
           <a:p>
-            <a:pPr indent="0" marL="0">
-              <a:buNone/>
-            </a:pPr>
-            <a:r>
-              <a:rPr lang="en-US" sz="900" spc="200" kern="0" dirty="0">
+            <a:pPr marL="0" indent="0">
+              <a:buNone/>
+            </a:pPr>
+            <a:r>
+              <a:rPr lang="en-US" sz="900" kern="0" spc="200" dirty="0">
                 <a:solidFill>
                   <a:srgbClr val="F1ECDD"/>
                 </a:solidFill>
@@ -2579,7 +2405,7 @@
           <a:bodyPr wrap="square" rtlCol="0" anchor="ctr"/>
           <a:lstStyle/>
           <a:p>
-            <a:pPr algn="r" indent="0" marL="0">
+            <a:pPr marL="0" indent="0" algn="r">
               <a:buNone/>
             </a:pPr>
             <a:r>
@@ -2613,6 +2439,7 @@
         <a:solidFill>
           <a:srgbClr val="FFFFFF"/>
         </a:solidFill>
+        <a:effectLst/>
       </p:bgPr>
     </p:bg>
     <p:spTree>
@@ -2650,7 +2477,7 @@
           <a:bodyPr wrap="square" lIns="0" tIns="0" rIns="0" bIns="0" rtlCol="0" anchor="t"/>
           <a:lstStyle/>
           <a:p>
-            <a:pPr indent="0" marL="0">
+            <a:pPr marL="0" indent="0">
               <a:buNone/>
             </a:pPr>
             <a:r>
@@ -2694,6 +2521,13 @@
             <a:prstDash val="solid"/>
           </a:ln>
         </p:spPr>
+        <p:txBody>
+          <a:bodyPr/>
+          <a:lstStyle/>
+          <a:p>
+            <a:endParaRPr lang="de-CH"/>
+          </a:p>
+        </p:txBody>
       </p:sp>
       <p:sp>
         <p:nvSpPr>
@@ -2703,7 +2537,7 @@
         </p:nvSpPr>
         <p:spPr>
           <a:xfrm>
-            <a:off x="548640" y="2103120"/>
+            <a:off x="548640" y="2113280"/>
             <a:ext cx="73152" cy="2377440"/>
           </a:xfrm>
           <a:prstGeom prst="rect">
@@ -2721,6 +2555,13 @@
             <a:prstDash val="solid"/>
           </a:ln>
         </p:spPr>
+        <p:txBody>
+          <a:bodyPr/>
+          <a:lstStyle/>
+          <a:p>
+            <a:endParaRPr lang="de-CH"/>
+          </a:p>
+        </p:txBody>
       </p:sp>
       <p:sp>
         <p:nvSpPr>
@@ -2743,7 +2584,7 @@
           <a:bodyPr wrap="square" lIns="0" tIns="0" rIns="0" bIns="0" rtlCol="0" anchor="t"/>
           <a:lstStyle/>
           <a:p>
-            <a:pPr indent="0" marL="0">
+            <a:pPr marL="0" indent="0">
               <a:buNone/>
             </a:pPr>
             <a:r>
@@ -2760,7 +2601,7 @@
             <a:endParaRPr lang="en-US" sz="2200" dirty="0"/>
           </a:p>
           <a:p>
-            <a:pPr indent="0" marL="0">
+            <a:pPr marL="0" indent="0">
               <a:buNone/>
             </a:pPr>
             <a:r>
@@ -2799,7 +2640,7 @@
           <a:bodyPr wrap="square" lIns="0" tIns="0" rIns="0" bIns="0" rtlCol="0" anchor="t"/>
           <a:lstStyle/>
           <a:p>
-            <a:pPr indent="0" marL="0">
+            <a:pPr marL="0" indent="0">
               <a:buNone/>
             </a:pPr>
             <a:r>
@@ -2816,7 +2657,7 @@
             <a:endParaRPr lang="en-US" sz="1500" dirty="0"/>
           </a:p>
           <a:p>
-            <a:pPr indent="0" marL="0">
+            <a:pPr marL="0" indent="0">
               <a:buNone/>
             </a:pPr>
             <a:r>
@@ -2860,6 +2701,13 @@
             <a:prstDash val="solid"/>
           </a:ln>
         </p:spPr>
+        <p:txBody>
+          <a:bodyPr/>
+          <a:lstStyle/>
+          <a:p>
+            <a:endParaRPr lang="de-CH"/>
+          </a:p>
+        </p:txBody>
       </p:sp>
       <p:sp>
         <p:nvSpPr>
@@ -2887,6 +2735,13 @@
             <a:prstDash val="solid"/>
           </a:ln>
         </p:spPr>
+        <p:txBody>
+          <a:bodyPr/>
+          <a:lstStyle/>
+          <a:p>
+            <a:endParaRPr lang="de-CH"/>
+          </a:p>
+        </p:txBody>
       </p:sp>
       <p:sp>
         <p:nvSpPr>
@@ -2909,11 +2764,11 @@
           <a:bodyPr wrap="square" lIns="0" tIns="0" rIns="0" bIns="0" rtlCol="0" anchor="t"/>
           <a:lstStyle/>
           <a:p>
-            <a:pPr indent="0" marL="0">
-              <a:buNone/>
-            </a:pPr>
-            <a:r>
-              <a:rPr lang="en-US" sz="2200" b="1" dirty="0">
+            <a:pPr marL="0" indent="0">
+              <a:buNone/>
+            </a:pPr>
+            <a:r>
+              <a:rPr lang="en-US" sz="2000" b="1" dirty="0">
                 <a:solidFill>
                   <a:srgbClr val="1A3A4A"/>
                 </a:solidFill>
@@ -2923,14 +2778,14 @@
               </a:rPr>
               <a:t>Kurzer Schreck</a:t>
             </a:r>
-            <a:endParaRPr lang="en-US" sz="2200" dirty="0"/>
-          </a:p>
-          <a:p>
-            <a:pPr indent="0" marL="0">
-              <a:buNone/>
-            </a:pPr>
-            <a:r>
-              <a:rPr lang="en-US" sz="2200" b="1" dirty="0">
+            <a:endParaRPr lang="en-US" sz="2000" dirty="0"/>
+          </a:p>
+          <a:p>
+            <a:pPr marL="0" indent="0">
+              <a:buNone/>
+            </a:pPr>
+            <a:r>
+              <a:rPr lang="en-US" sz="2000" b="1" dirty="0">
                 <a:solidFill>
                   <a:srgbClr val="1A3A4A"/>
                 </a:solidFill>
@@ -2940,7 +2795,7 @@
               </a:rPr>
               <a:t>bei den anderen</a:t>
             </a:r>
-            <a:endParaRPr lang="en-US" sz="2200" dirty="0"/>
+            <a:endParaRPr lang="en-US" sz="2000" dirty="0"/>
           </a:p>
         </p:txBody>
       </p:sp>
@@ -2965,7 +2820,7 @@
           <a:bodyPr wrap="square" lIns="0" tIns="0" rIns="0" bIns="0" rtlCol="0" anchor="t"/>
           <a:lstStyle/>
           <a:p>
-            <a:pPr indent="0" marL="0">
+            <a:pPr marL="0" indent="0">
               <a:buNone/>
             </a:pPr>
             <a:r>
@@ -2982,13 +2837,13 @@
             <a:endParaRPr lang="en-US" sz="1500" dirty="0"/>
           </a:p>
           <a:p>
-            <a:pPr indent="0" marL="0">
+            <a:pPr marL="0" indent="0">
               <a:buNone/>
             </a:pPr>
             <a:endParaRPr lang="en-US" sz="1500" dirty="0"/>
           </a:p>
           <a:p>
-            <a:pPr indent="0" marL="0">
+            <a:pPr marL="0" indent="0">
               <a:buNone/>
             </a:pPr>
             <a:r>
@@ -3032,6 +2887,13 @@
             <a:prstDash val="solid"/>
           </a:ln>
         </p:spPr>
+        <p:txBody>
+          <a:bodyPr/>
+          <a:lstStyle/>
+          <a:p>
+            <a:endParaRPr lang="de-CH"/>
+          </a:p>
+        </p:txBody>
       </p:sp>
       <p:sp>
         <p:nvSpPr>
@@ -3059,6 +2921,13 @@
             <a:prstDash val="solid"/>
           </a:ln>
         </p:spPr>
+        <p:txBody>
+          <a:bodyPr/>
+          <a:lstStyle/>
+          <a:p>
+            <a:endParaRPr lang="de-CH"/>
+          </a:p>
+        </p:txBody>
       </p:sp>
       <p:sp>
         <p:nvSpPr>
@@ -3081,11 +2950,11 @@
           <a:bodyPr wrap="square" lIns="0" tIns="0" rIns="0" bIns="0" rtlCol="0" anchor="t"/>
           <a:lstStyle/>
           <a:p>
-            <a:pPr indent="0" marL="0">
-              <a:buNone/>
-            </a:pPr>
-            <a:r>
-              <a:rPr lang="en-US" sz="2200" b="1" dirty="0">
+            <a:pPr marL="0" indent="0">
+              <a:buNone/>
+            </a:pPr>
+            <a:r>
+              <a:rPr lang="en-US" b="1" dirty="0">
                 <a:solidFill>
                   <a:srgbClr val="1A3A4A"/>
                 </a:solidFill>
@@ -3095,14 +2964,14 @@
               </a:rPr>
               <a:t>Nach 2 Wochen</a:t>
             </a:r>
-            <a:endParaRPr lang="en-US" sz="2200" dirty="0"/>
-          </a:p>
-          <a:p>
-            <a:pPr indent="0" marL="0">
-              <a:buNone/>
-            </a:pPr>
-            <a:r>
-              <a:rPr lang="en-US" sz="2200" b="1" dirty="0">
+            <a:endParaRPr lang="en-US" dirty="0"/>
+          </a:p>
+          <a:p>
+            <a:pPr marL="0" indent="0">
+              <a:buNone/>
+            </a:pPr>
+            <a:r>
+              <a:rPr lang="en-US" b="1" dirty="0">
                 <a:solidFill>
                   <a:srgbClr val="1A3A4A"/>
                 </a:solidFill>
@@ -3112,7 +2981,7 @@
               </a:rPr>
               <a:t>merkt es niemand</a:t>
             </a:r>
-            <a:endParaRPr lang="en-US" sz="2200" dirty="0"/>
+            <a:endParaRPr lang="en-US" dirty="0"/>
           </a:p>
         </p:txBody>
       </p:sp>
@@ -3137,7 +3006,7 @@
           <a:bodyPr wrap="square" lIns="0" tIns="0" rIns="0" bIns="0" rtlCol="0" anchor="t"/>
           <a:lstStyle/>
           <a:p>
-            <a:pPr indent="0" marL="0">
+            <a:pPr marL="0" indent="0">
               <a:buNone/>
             </a:pPr>
             <a:r>
@@ -3154,7 +3023,7 @@
             <a:endParaRPr lang="en-US" sz="1500" dirty="0"/>
           </a:p>
           <a:p>
-            <a:pPr indent="0" marL="0">
+            <a:pPr marL="0" indent="0">
               <a:buNone/>
             </a:pPr>
             <a:r>
@@ -3193,11 +3062,11 @@
           <a:bodyPr wrap="square" rtlCol="0" anchor="ctr"/>
           <a:lstStyle/>
           <a:p>
-            <a:pPr indent="0" marL="0">
-              <a:buNone/>
-            </a:pPr>
-            <a:r>
-              <a:rPr lang="en-US" sz="900" spc="200" kern="0" dirty="0">
+            <a:pPr marL="0" indent="0">
+              <a:buNone/>
+            </a:pPr>
+            <a:r>
+              <a:rPr lang="en-US" sz="900" kern="0" spc="200" dirty="0">
                 <a:solidFill>
                   <a:srgbClr val="7A8A95"/>
                 </a:solidFill>
@@ -3232,7 +3101,7 @@
           <a:bodyPr wrap="square" rtlCol="0" anchor="ctr"/>
           <a:lstStyle/>
           <a:p>
-            <a:pPr algn="r" indent="0" marL="0">
+            <a:pPr marL="0" indent="0" algn="r">
               <a:buNone/>
             </a:pPr>
             <a:r>
@@ -3266,6 +3135,7 @@
         <a:solidFill>
           <a:srgbClr val="12828C"/>
         </a:solidFill>
+        <a:effectLst/>
       </p:bgPr>
     </p:bg>
     <p:spTree>
@@ -3290,7 +3160,7 @@
         </p:nvSpPr>
         <p:spPr>
           <a:xfrm>
-            <a:off x="548640" y="1188720"/>
+            <a:off x="548640" y="476673"/>
             <a:ext cx="8046720" cy="365760"/>
           </a:xfrm>
           <a:prstGeom prst="rect">
@@ -3303,11 +3173,11 @@
           <a:bodyPr wrap="square" rtlCol="0" anchor="ctr"/>
           <a:lstStyle/>
           <a:p>
-            <a:pPr algn="ctr" indent="0" marL="0">
-              <a:buNone/>
-            </a:pPr>
-            <a:r>
-              <a:rPr lang="en-US" sz="1100" b="1" spc="400" kern="0" dirty="0">
+            <a:pPr marL="0" indent="0" algn="ctr">
+              <a:buNone/>
+            </a:pPr>
+            <a:r>
+              <a:rPr lang="en-US" sz="1100" b="1" kern="0" spc="400" dirty="0">
                 <a:solidFill>
                   <a:srgbClr val="DC822E"/>
                 </a:solidFill>
@@ -3329,7 +3199,7 @@
         </p:nvSpPr>
         <p:spPr>
           <a:xfrm>
-            <a:off x="4297680" y="1691640"/>
+            <a:off x="4297680" y="824145"/>
             <a:ext cx="548640" cy="36576"/>
           </a:xfrm>
           <a:prstGeom prst="rect">
@@ -3347,6 +3217,13 @@
             <a:prstDash val="solid"/>
           </a:ln>
         </p:spPr>
+        <p:txBody>
+          <a:bodyPr/>
+          <a:lstStyle/>
+          <a:p>
+            <a:endParaRPr lang="de-CH"/>
+          </a:p>
+        </p:txBody>
       </p:sp>
       <p:sp>
         <p:nvSpPr>
@@ -3356,7 +3233,7 @@
         </p:nvSpPr>
         <p:spPr>
           <a:xfrm>
-            <a:off x="548640" y="2011680"/>
+            <a:off x="548640" y="1544320"/>
             <a:ext cx="8046720" cy="2286000"/>
           </a:xfrm>
           <a:prstGeom prst="rect">
@@ -3369,11 +3246,11 @@
           <a:bodyPr wrap="square" lIns="0" tIns="0" rIns="0" bIns="0" rtlCol="0" anchor="ctr"/>
           <a:lstStyle/>
           <a:p>
-            <a:pPr algn="ctr" indent="0" marL="0">
-              <a:buNone/>
-            </a:pPr>
-            <a:r>
-              <a:rPr lang="en-US" sz="3600" b="1" dirty="0">
+            <a:pPr marL="0" indent="0" algn="ctr">
+              <a:buNone/>
+            </a:pPr>
+            <a:r>
+              <a:rPr lang="en-US" sz="2800" b="1" dirty="0">
                 <a:solidFill>
                   <a:srgbClr val="F1ECDD"/>
                 </a:solidFill>
@@ -3383,14 +3260,14 @@
               </a:rPr>
               <a:t>Deine 7 verbleibenden Hüte aufs Hauptfeld im Arbeitsblatt.</a:t>
             </a:r>
-            <a:endParaRPr lang="en-US" sz="3600" dirty="0"/>
-          </a:p>
-          <a:p>
-            <a:pPr algn="ctr" indent="0" marL="0">
-              <a:buNone/>
-            </a:pPr>
-            <a:r>
-              <a:rPr lang="en-US" sz="3600" b="1" dirty="0">
+            <a:endParaRPr lang="en-US" sz="2800" dirty="0"/>
+          </a:p>
+          <a:p>
+            <a:pPr marL="0" indent="0" algn="ctr">
+              <a:buNone/>
+            </a:pPr>
+            <a:r>
+              <a:rPr lang="en-US" sz="2800" b="1" dirty="0">
                 <a:solidFill>
                   <a:srgbClr val="F1ECDD"/>
                 </a:solidFill>
@@ -3400,14 +3277,14 @@
               </a:rPr>
               <a:t>Die sind ab jetzt DEINE Rollen.</a:t>
             </a:r>
-            <a:endParaRPr lang="en-US" sz="3600" dirty="0"/>
-          </a:p>
-          <a:p>
-            <a:pPr algn="ctr" indent="0" marL="0">
-              <a:buNone/>
-            </a:pPr>
-            <a:r>
-              <a:rPr lang="en-US" sz="3600" b="1" dirty="0">
+            <a:endParaRPr lang="en-US" sz="2800" dirty="0"/>
+          </a:p>
+          <a:p>
+            <a:pPr marL="0" indent="0" algn="ctr">
+              <a:buNone/>
+            </a:pPr>
+            <a:r>
+              <a:rPr lang="en-US" sz="2800" b="1" dirty="0">
                 <a:solidFill>
                   <a:srgbClr val="F1ECDD"/>
                 </a:solidFill>
@@ -3417,14 +3294,14 @@
               </a:rPr>
               <a:t>Wenn jemand fragt „übernimmst du Rolle X?" und X passt zu keiner deiner 7 —</a:t>
             </a:r>
-            <a:endParaRPr lang="en-US" sz="3600" dirty="0"/>
-          </a:p>
-          <a:p>
-            <a:pPr algn="ctr" indent="0" marL="0">
-              <a:buNone/>
-            </a:pPr>
-            <a:r>
-              <a:rPr lang="en-US" sz="3600" b="1" dirty="0">
+            <a:endParaRPr lang="en-US" sz="2800" dirty="0"/>
+          </a:p>
+          <a:p>
+            <a:pPr marL="0" indent="0" algn="ctr">
+              <a:buNone/>
+            </a:pPr>
+            <a:r>
+              <a:rPr lang="en-US" sz="2800" b="1" dirty="0">
                 <a:solidFill>
                   <a:srgbClr val="F1ECDD"/>
                 </a:solidFill>
@@ -3434,7 +3311,7 @@
               </a:rPr>
               <a:t>antwortest du höflich aber klar: Nein.</a:t>
             </a:r>
-            <a:endParaRPr lang="en-US" sz="3600" dirty="0"/>
+            <a:endParaRPr lang="en-US" sz="2800" dirty="0"/>
           </a:p>
         </p:txBody>
       </p:sp>
@@ -3459,11 +3336,11 @@
           <a:bodyPr wrap="square" rtlCol="0" anchor="ctr"/>
           <a:lstStyle/>
           <a:p>
-            <a:pPr indent="0" marL="0">
-              <a:buNone/>
-            </a:pPr>
-            <a:r>
-              <a:rPr lang="en-US" sz="900" spc="200" kern="0" dirty="0">
+            <a:pPr marL="0" indent="0">
+              <a:buNone/>
+            </a:pPr>
+            <a:r>
+              <a:rPr lang="en-US" sz="900" kern="0" spc="200" dirty="0">
                 <a:solidFill>
                   <a:srgbClr val="F1ECDD"/>
                 </a:solidFill>
@@ -3498,7 +3375,7 @@
           <a:bodyPr wrap="square" rtlCol="0" anchor="ctr"/>
           <a:lstStyle/>
           <a:p>
-            <a:pPr algn="r" indent="0" marL="0">
+            <a:pPr marL="0" indent="0" algn="r">
               <a:buNone/>
             </a:pPr>
             <a:r>
@@ -3532,6 +3409,7 @@
         <a:solidFill>
           <a:srgbClr val="FFFFFF"/>
         </a:solidFill>
+        <a:effectLst/>
       </p:bgPr>
     </p:bg>
     <p:spTree>
@@ -3569,7 +3447,7 @@
           <a:bodyPr wrap="square" lIns="0" tIns="0" rIns="0" bIns="0" rtlCol="0" anchor="t"/>
           <a:lstStyle/>
           <a:p>
-            <a:pPr indent="0" marL="0">
+            <a:pPr marL="0" indent="0">
               <a:buNone/>
             </a:pPr>
             <a:r>
@@ -3613,6 +3491,13 @@
             <a:prstDash val="solid"/>
           </a:ln>
         </p:spPr>
+        <p:txBody>
+          <a:bodyPr/>
+          <a:lstStyle/>
+          <a:p>
+            <a:endParaRPr lang="de-CH"/>
+          </a:p>
+        </p:txBody>
       </p:sp>
       <p:sp>
         <p:nvSpPr>
@@ -3640,6 +3525,13 @@
             <a:prstDash val="solid"/>
           </a:ln>
         </p:spPr>
+        <p:txBody>
+          <a:bodyPr/>
+          <a:lstStyle/>
+          <a:p>
+            <a:endParaRPr lang="de-CH"/>
+          </a:p>
+        </p:txBody>
       </p:sp>
       <p:sp>
         <p:nvSpPr>
@@ -3662,11 +3554,11 @@
           <a:bodyPr wrap="square" rtlCol="0" anchor="ctr"/>
           <a:lstStyle/>
           <a:p>
-            <a:pPr indent="0" marL="0">
-              <a:buNone/>
-            </a:pPr>
-            <a:r>
-              <a:rPr lang="en-US" sz="1000" b="1" spc="300" kern="0" dirty="0">
+            <a:pPr marL="0" indent="0">
+              <a:buNone/>
+            </a:pPr>
+            <a:r>
+              <a:rPr lang="en-US" sz="1000" b="1" kern="0" spc="300" dirty="0">
                 <a:solidFill>
                   <a:srgbClr val="0D6168"/>
                 </a:solidFill>
@@ -3701,7 +3593,7 @@
           <a:bodyPr wrap="square" lIns="0" tIns="0" rIns="0" bIns="0" rtlCol="0" anchor="t"/>
           <a:lstStyle/>
           <a:p>
-            <a:pPr indent="0" marL="0">
+            <a:pPr marL="0" indent="0">
               <a:buNone/>
             </a:pPr>
             <a:r>
@@ -3872,6 +3764,13 @@
             <a:prstDash val="solid"/>
           </a:ln>
         </p:spPr>
+        <p:txBody>
+          <a:bodyPr/>
+          <a:lstStyle/>
+          <a:p>
+            <a:endParaRPr lang="de-CH"/>
+          </a:p>
+        </p:txBody>
       </p:sp>
       <p:sp>
         <p:nvSpPr>
@@ -3899,6 +3798,13 @@
             <a:prstDash val="solid"/>
           </a:ln>
         </p:spPr>
+        <p:txBody>
+          <a:bodyPr/>
+          <a:lstStyle/>
+          <a:p>
+            <a:endParaRPr lang="de-CH"/>
+          </a:p>
+        </p:txBody>
       </p:sp>
       <p:sp>
         <p:nvSpPr>
@@ -3921,11 +3827,11 @@
           <a:bodyPr wrap="square" rtlCol="0" anchor="ctr"/>
           <a:lstStyle/>
           <a:p>
-            <a:pPr indent="0" marL="0">
-              <a:buNone/>
-            </a:pPr>
-            <a:r>
-              <a:rPr lang="en-US" sz="1000" b="1" spc="300" kern="0" dirty="0">
+            <a:pPr marL="0" indent="0">
+              <a:buNone/>
+            </a:pPr>
+            <a:r>
+              <a:rPr lang="en-US" sz="1000" b="1" kern="0" spc="300" dirty="0">
                 <a:solidFill>
                   <a:srgbClr val="DC822E"/>
                 </a:solidFill>
@@ -3960,7 +3866,7 @@
           <a:bodyPr wrap="square" lIns="0" tIns="0" rIns="0" bIns="0" rtlCol="0" anchor="t"/>
           <a:lstStyle/>
           <a:p>
-            <a:pPr indent="0" marL="0">
+            <a:pPr marL="0" indent="0">
               <a:buNone/>
             </a:pPr>
             <a:r>
@@ -4084,11 +3990,11 @@
           <a:bodyPr wrap="square" rtlCol="0" anchor="ctr"/>
           <a:lstStyle/>
           <a:p>
-            <a:pPr indent="0" marL="0">
-              <a:buNone/>
-            </a:pPr>
-            <a:r>
-              <a:rPr lang="en-US" sz="900" spc="200" kern="0" dirty="0">
+            <a:pPr marL="0" indent="0">
+              <a:buNone/>
+            </a:pPr>
+            <a:r>
+              <a:rPr lang="en-US" sz="900" kern="0" spc="200" dirty="0">
                 <a:solidFill>
                   <a:srgbClr val="7A8A95"/>
                 </a:solidFill>
@@ -4123,7 +4029,7 @@
           <a:bodyPr wrap="square" rtlCol="0" anchor="ctr"/>
           <a:lstStyle/>
           <a:p>
-            <a:pPr algn="r" indent="0" marL="0">
+            <a:pPr marL="0" indent="0" algn="r">
               <a:buNone/>
             </a:pPr>
             <a:r>
@@ -4157,6 +4063,7 @@
         <a:solidFill>
           <a:srgbClr val="12828C"/>
         </a:solidFill>
+        <a:effectLst/>
       </p:bgPr>
     </p:bg>
     <p:spTree>
@@ -4181,7 +4088,7 @@
         </p:nvSpPr>
         <p:spPr>
           <a:xfrm>
-            <a:off x="548640" y="1188720"/>
+            <a:off x="548640" y="585893"/>
             <a:ext cx="8046720" cy="365760"/>
           </a:xfrm>
           <a:prstGeom prst="rect">
@@ -4194,11 +4101,11 @@
           <a:bodyPr wrap="square" rtlCol="0" anchor="ctr"/>
           <a:lstStyle/>
           <a:p>
-            <a:pPr algn="ctr" indent="0" marL="0">
-              <a:buNone/>
-            </a:pPr>
-            <a:r>
-              <a:rPr lang="en-US" sz="1100" b="1" spc="400" kern="0" dirty="0">
+            <a:pPr marL="0" indent="0" algn="ctr">
+              <a:buNone/>
+            </a:pPr>
+            <a:r>
+              <a:rPr lang="en-US" sz="1100" b="1" kern="0" spc="400" dirty="0">
                 <a:solidFill>
                   <a:srgbClr val="DC822E"/>
                 </a:solidFill>
@@ -4220,7 +4127,7 @@
         </p:nvSpPr>
         <p:spPr>
           <a:xfrm>
-            <a:off x="4297680" y="1691640"/>
+            <a:off x="4297680" y="951653"/>
             <a:ext cx="548640" cy="36576"/>
           </a:xfrm>
           <a:prstGeom prst="rect">
@@ -4238,6 +4145,13 @@
             <a:prstDash val="solid"/>
           </a:ln>
         </p:spPr>
+        <p:txBody>
+          <a:bodyPr/>
+          <a:lstStyle/>
+          <a:p>
+            <a:endParaRPr lang="de-CH"/>
+          </a:p>
+        </p:txBody>
       </p:sp>
       <p:sp>
         <p:nvSpPr>
@@ -4260,11 +4174,11 @@
           <a:bodyPr wrap="square" lIns="0" tIns="0" rIns="0" bIns="0" rtlCol="0" anchor="ctr"/>
           <a:lstStyle/>
           <a:p>
-            <a:pPr algn="ctr" indent="0" marL="0">
-              <a:buNone/>
-            </a:pPr>
-            <a:r>
-              <a:rPr lang="en-US" sz="3600" b="1" dirty="0">
+            <a:pPr marL="0" indent="0" algn="ctr">
+              <a:buNone/>
+            </a:pPr>
+            <a:r>
+              <a:rPr lang="en-US" sz="3200" b="1" dirty="0">
                 <a:solidFill>
                   <a:srgbClr val="F1ECDD"/>
                 </a:solidFill>
@@ -4274,14 +4188,14 @@
               </a:rPr>
               <a:t>In der nächsten Lektion gehen wir die einzelnen AUFGABEN durch.</a:t>
             </a:r>
-            <a:endParaRPr lang="en-US" sz="3600" dirty="0"/>
-          </a:p>
-          <a:p>
-            <a:pPr algn="ctr" indent="0" marL="0">
-              <a:buNone/>
-            </a:pPr>
-            <a:r>
-              <a:rPr lang="en-US" sz="3600" b="1" dirty="0">
+            <a:endParaRPr lang="en-US" sz="3200" dirty="0"/>
+          </a:p>
+          <a:p>
+            <a:pPr marL="0" indent="0" algn="ctr">
+              <a:buNone/>
+            </a:pPr>
+            <a:r>
+              <a:rPr lang="en-US" sz="3200" b="1" dirty="0">
                 <a:solidFill>
                   <a:srgbClr val="F1ECDD"/>
                 </a:solidFill>
@@ -4291,14 +4205,14 @@
               </a:rPr>
               <a:t>Pro Aufgabe: behalten · delegieren · automatisieren · aufhören.</a:t>
             </a:r>
-            <a:endParaRPr lang="en-US" sz="3600" dirty="0"/>
-          </a:p>
-          <a:p>
-            <a:pPr algn="ctr" indent="0" marL="0">
-              <a:buNone/>
-            </a:pPr>
-            <a:r>
-              <a:rPr lang="en-US" sz="3600" b="1" dirty="0">
+            <a:endParaRPr lang="en-US" sz="3200" dirty="0"/>
+          </a:p>
+          <a:p>
+            <a:pPr marL="0" indent="0" algn="ctr">
+              <a:buNone/>
+            </a:pPr>
+            <a:r>
+              <a:rPr lang="en-US" sz="3200" b="1" dirty="0">
                 <a:solidFill>
                   <a:srgbClr val="F1ECDD"/>
                 </a:solidFill>
@@ -4308,7 +4222,7 @@
               </a:rPr>
               <a:t>Bis dann.</a:t>
             </a:r>
-            <a:endParaRPr lang="en-US" sz="3600" dirty="0"/>
+            <a:endParaRPr lang="en-US" sz="3200" dirty="0"/>
           </a:p>
         </p:txBody>
       </p:sp>
@@ -4333,11 +4247,11 @@
           <a:bodyPr wrap="square" rtlCol="0" anchor="ctr"/>
           <a:lstStyle/>
           <a:p>
-            <a:pPr indent="0" marL="0">
-              <a:buNone/>
-            </a:pPr>
-            <a:r>
-              <a:rPr lang="en-US" sz="900" spc="200" kern="0" dirty="0">
+            <a:pPr marL="0" indent="0">
+              <a:buNone/>
+            </a:pPr>
+            <a:r>
+              <a:rPr lang="en-US" sz="900" kern="0" spc="200" dirty="0">
                 <a:solidFill>
                   <a:srgbClr val="F1ECDD"/>
                 </a:solidFill>
@@ -4372,7 +4286,7 @@
           <a:bodyPr wrap="square" rtlCol="0" anchor="ctr"/>
           <a:lstStyle/>
           <a:p>
-            <a:pPr algn="r" indent="0" marL="0">
+            <a:pPr marL="0" indent="0" algn="r">
               <a:buNone/>
             </a:pPr>
             <a:r>
@@ -4406,6 +4320,7 @@
         <a:solidFill>
           <a:srgbClr val="12828C"/>
         </a:solidFill>
+        <a:effectLst/>
       </p:bgPr>
     </p:bg>
     <p:spTree>
@@ -4430,7 +4345,7 @@
         </p:nvSpPr>
         <p:spPr>
           <a:xfrm>
-            <a:off x="548640" y="1188720"/>
+            <a:off x="548640" y="281093"/>
             <a:ext cx="8046720" cy="365760"/>
           </a:xfrm>
           <a:prstGeom prst="rect">
@@ -4443,11 +4358,11 @@
           <a:bodyPr wrap="square" rtlCol="0" anchor="ctr"/>
           <a:lstStyle/>
           <a:p>
-            <a:pPr algn="ctr" indent="0" marL="0">
-              <a:buNone/>
-            </a:pPr>
-            <a:r>
-              <a:rPr lang="en-US" sz="1100" b="1" spc="400" kern="0" dirty="0">
+            <a:pPr marL="0" indent="0" algn="ctr">
+              <a:buNone/>
+            </a:pPr>
+            <a:r>
+              <a:rPr lang="en-US" sz="1100" b="1" kern="0" spc="400" dirty="0">
                 <a:solidFill>
                   <a:srgbClr val="DC822E"/>
                 </a:solidFill>
@@ -4469,7 +4384,7 @@
         </p:nvSpPr>
         <p:spPr>
           <a:xfrm>
-            <a:off x="4297680" y="1691640"/>
+            <a:off x="4297680" y="608584"/>
             <a:ext cx="548640" cy="36576"/>
           </a:xfrm>
           <a:prstGeom prst="rect">
@@ -4487,6 +4402,13 @@
             <a:prstDash val="solid"/>
           </a:ln>
         </p:spPr>
+        <p:txBody>
+          <a:bodyPr/>
+          <a:lstStyle/>
+          <a:p>
+            <a:endParaRPr lang="de-CH"/>
+          </a:p>
+        </p:txBody>
       </p:sp>
       <p:sp>
         <p:nvSpPr>
@@ -4496,7 +4418,7 @@
         </p:nvSpPr>
         <p:spPr>
           <a:xfrm>
-            <a:off x="548640" y="2011680"/>
+            <a:off x="548640" y="1774613"/>
             <a:ext cx="8046720" cy="2286000"/>
           </a:xfrm>
           <a:prstGeom prst="rect">
@@ -4509,7 +4431,7 @@
           <a:bodyPr wrap="square" lIns="0" tIns="0" rIns="0" bIns="0" rtlCol="0" anchor="ctr"/>
           <a:lstStyle/>
           <a:p>
-            <a:pPr algn="ctr" indent="0" marL="0">
+            <a:pPr marL="0" indent="0" algn="ctr">
               <a:buNone/>
             </a:pPr>
             <a:r>
@@ -4521,16 +4443,10 @@
                 <a:ea typeface="Georgia" pitchFamily="34" charset="-122"/>
                 <a:cs typeface="Georgia" pitchFamily="34" charset="-120"/>
               </a:rPr>
-              <a:t>Jede Rolle die du in deinem Leben trägst,</a:t>
-            </a:r>
-            <a:endParaRPr lang="en-US" sz="3600" dirty="0"/>
-          </a:p>
-          <a:p>
-            <a:pPr algn="ctr" indent="0" marL="0">
-              <a:buNone/>
-            </a:pPr>
-            <a:r>
-              <a:rPr lang="en-US" sz="3600" b="1" dirty="0">
+              <a:t>Jede Rolle die du in deinem Leben </a:t>
+            </a:r>
+            <a:r>
+              <a:rPr lang="en-US" sz="3600" b="1" dirty="0" err="1">
                 <a:solidFill>
                   <a:srgbClr val="F1ECDD"/>
                 </a:solidFill>
@@ -4538,14 +4454,8 @@
                 <a:ea typeface="Georgia" pitchFamily="34" charset="-122"/>
                 <a:cs typeface="Georgia" pitchFamily="34" charset="-120"/>
               </a:rPr>
-              <a:t>ist ein Hut.</a:t>
-            </a:r>
-            <a:endParaRPr lang="en-US" sz="3600" dirty="0"/>
-          </a:p>
-          <a:p>
-            <a:pPr algn="ctr" indent="0" marL="0">
-              <a:buNone/>
-            </a:pPr>
+              <a:t>trägst</a:t>
+            </a:r>
             <a:r>
               <a:rPr lang="en-US" sz="3600" b="1" dirty="0">
                 <a:solidFill>
@@ -4555,6 +4465,49 @@
                 <a:ea typeface="Georgia" pitchFamily="34" charset="-122"/>
                 <a:cs typeface="Georgia" pitchFamily="34" charset="-120"/>
               </a:rPr>
+              <a:t>,</a:t>
+            </a:r>
+            <a:r>
+              <a:rPr lang="en-US" sz="3600" dirty="0"/>
+              <a:t> </a:t>
+            </a:r>
+            <a:r>
+              <a:rPr lang="en-US" sz="3600" b="1" dirty="0" err="1">
+                <a:solidFill>
+                  <a:srgbClr val="F1ECDD"/>
+                </a:solidFill>
+                <a:latin typeface="Georgia" pitchFamily="34" charset="0"/>
+                <a:ea typeface="Georgia" pitchFamily="34" charset="-122"/>
+                <a:cs typeface="Georgia" pitchFamily="34" charset="-120"/>
+              </a:rPr>
+              <a:t>ist</a:t>
+            </a:r>
+            <a:r>
+              <a:rPr lang="en-US" sz="3600" b="1" dirty="0">
+                <a:solidFill>
+                  <a:srgbClr val="F1ECDD"/>
+                </a:solidFill>
+                <a:latin typeface="Georgia" pitchFamily="34" charset="0"/>
+                <a:ea typeface="Georgia" pitchFamily="34" charset="-122"/>
+                <a:cs typeface="Georgia" pitchFamily="34" charset="-120"/>
+              </a:rPr>
+              <a:t> ein Hut.</a:t>
+            </a:r>
+            <a:endParaRPr lang="en-US" sz="3600" dirty="0"/>
+          </a:p>
+          <a:p>
+            <a:pPr marL="0" indent="0" algn="ctr">
+              <a:buNone/>
+            </a:pPr>
+            <a:r>
+              <a:rPr lang="en-US" sz="3600" b="1" dirty="0">
+                <a:solidFill>
+                  <a:srgbClr val="F1ECDD"/>
+                </a:solidFill>
+                <a:latin typeface="Georgia" pitchFamily="34" charset="0"/>
+                <a:ea typeface="Georgia" pitchFamily="34" charset="-122"/>
+                <a:cs typeface="Georgia" pitchFamily="34" charset="-120"/>
+              </a:rPr>
               <a:t>Mama · Frau · Tochter · Networkerin · Unternehmerin · Hausfrau ...</a:t>
             </a:r>
             <a:endParaRPr lang="en-US" sz="3600" dirty="0"/>
@@ -4582,11 +4535,11 @@
           <a:bodyPr wrap="square" rtlCol="0" anchor="ctr"/>
           <a:lstStyle/>
           <a:p>
-            <a:pPr indent="0" marL="0">
-              <a:buNone/>
-            </a:pPr>
-            <a:r>
-              <a:rPr lang="en-US" sz="900" spc="200" kern="0" dirty="0">
+            <a:pPr marL="0" indent="0">
+              <a:buNone/>
+            </a:pPr>
+            <a:r>
+              <a:rPr lang="en-US" sz="900" kern="0" spc="200" dirty="0">
                 <a:solidFill>
                   <a:srgbClr val="F1ECDD"/>
                 </a:solidFill>
@@ -4621,7 +4574,7 @@
           <a:bodyPr wrap="square" rtlCol="0" anchor="ctr"/>
           <a:lstStyle/>
           <a:p>
-            <a:pPr algn="r" indent="0" marL="0">
+            <a:pPr marL="0" indent="0" algn="r">
               <a:buNone/>
             </a:pPr>
             <a:r>
@@ -4655,6 +4608,7 @@
         <a:solidFill>
           <a:srgbClr val="12828C"/>
         </a:solidFill>
+        <a:effectLst/>
       </p:bgPr>
     </p:bg>
     <p:spTree>
@@ -4679,7 +4633,7 @@
         </p:nvSpPr>
         <p:spPr>
           <a:xfrm>
-            <a:off x="548640" y="1188720"/>
+            <a:off x="548640" y="321733"/>
             <a:ext cx="8046720" cy="365760"/>
           </a:xfrm>
           <a:prstGeom prst="rect">
@@ -4692,11 +4646,11 @@
           <a:bodyPr wrap="square" rtlCol="0" anchor="ctr"/>
           <a:lstStyle/>
           <a:p>
-            <a:pPr algn="ctr" indent="0" marL="0">
-              <a:buNone/>
-            </a:pPr>
-            <a:r>
-              <a:rPr lang="en-US" sz="1100" b="1" spc="400" kern="0" dirty="0">
+            <a:pPr marL="0" indent="0" algn="ctr">
+              <a:buNone/>
+            </a:pPr>
+            <a:r>
+              <a:rPr lang="en-US" sz="1100" b="1" kern="0" spc="400" dirty="0">
                 <a:solidFill>
                   <a:srgbClr val="DC822E"/>
                 </a:solidFill>
@@ -4718,7 +4672,7 @@
         </p:nvSpPr>
         <p:spPr>
           <a:xfrm>
-            <a:off x="4297680" y="1691640"/>
+            <a:off x="4297680" y="650917"/>
             <a:ext cx="548640" cy="36576"/>
           </a:xfrm>
           <a:prstGeom prst="rect">
@@ -4736,6 +4690,13 @@
             <a:prstDash val="solid"/>
           </a:ln>
         </p:spPr>
+        <p:txBody>
+          <a:bodyPr/>
+          <a:lstStyle/>
+          <a:p>
+            <a:endParaRPr lang="de-CH"/>
+          </a:p>
+        </p:txBody>
       </p:sp>
       <p:sp>
         <p:nvSpPr>
@@ -4745,7 +4706,7 @@
         </p:nvSpPr>
         <p:spPr>
           <a:xfrm>
-            <a:off x="548640" y="2011680"/>
+            <a:off x="548640" y="1825245"/>
             <a:ext cx="8046720" cy="2286000"/>
           </a:xfrm>
           <a:prstGeom prst="rect">
@@ -4758,7 +4719,7 @@
           <a:bodyPr wrap="square" lIns="0" tIns="0" rIns="0" bIns="0" rtlCol="0" anchor="ctr"/>
           <a:lstStyle/>
           <a:p>
-            <a:pPr algn="ctr" indent="0" marL="0">
+            <a:pPr marL="0" indent="0" algn="ctr">
               <a:buNone/>
             </a:pPr>
             <a:r>
@@ -4775,7 +4736,7 @@
             <a:endParaRPr lang="en-US" sz="3600" dirty="0"/>
           </a:p>
           <a:p>
-            <a:pPr algn="ctr" indent="0" marL="0">
+            <a:pPr marL="0" indent="0" algn="ctr">
               <a:buNone/>
             </a:pPr>
             <a:r>
@@ -4792,7 +4753,7 @@
             <a:endParaRPr lang="en-US" sz="3600" dirty="0"/>
           </a:p>
           <a:p>
-            <a:pPr algn="ctr" indent="0" marL="0">
+            <a:pPr marL="0" indent="0" algn="ctr">
               <a:buNone/>
             </a:pPr>
             <a:r>
@@ -4809,7 +4770,7 @@
             <a:endParaRPr lang="en-US" sz="3600" dirty="0"/>
           </a:p>
           <a:p>
-            <a:pPr algn="ctr" indent="0" marL="0">
+            <a:pPr marL="0" indent="0" algn="ctr">
               <a:buNone/>
             </a:pPr>
             <a:r>
@@ -4848,11 +4809,11 @@
           <a:bodyPr wrap="square" rtlCol="0" anchor="ctr"/>
           <a:lstStyle/>
           <a:p>
-            <a:pPr indent="0" marL="0">
-              <a:buNone/>
-            </a:pPr>
-            <a:r>
-              <a:rPr lang="en-US" sz="900" spc="200" kern="0" dirty="0">
+            <a:pPr marL="0" indent="0">
+              <a:buNone/>
+            </a:pPr>
+            <a:r>
+              <a:rPr lang="en-US" sz="900" kern="0" spc="200" dirty="0">
                 <a:solidFill>
                   <a:srgbClr val="F1ECDD"/>
                 </a:solidFill>
@@ -4887,7 +4848,7 @@
           <a:bodyPr wrap="square" rtlCol="0" anchor="ctr"/>
           <a:lstStyle/>
           <a:p>
-            <a:pPr algn="r" indent="0" marL="0">
+            <a:pPr marL="0" indent="0" algn="r">
               <a:buNone/>
             </a:pPr>
             <a:r>
@@ -4921,6 +4882,7 @@
         <a:solidFill>
           <a:srgbClr val="FFFFFF"/>
         </a:solidFill>
+        <a:effectLst/>
       </p:bgPr>
     </p:bg>
     <p:spTree>
@@ -4958,7 +4920,7 @@
           <a:bodyPr wrap="square" lIns="0" tIns="0" rIns="0" bIns="0" rtlCol="0" anchor="t"/>
           <a:lstStyle/>
           <a:p>
-            <a:pPr indent="0" marL="0">
+            <a:pPr marL="0" indent="0">
               <a:buNone/>
             </a:pPr>
             <a:r>
@@ -5002,6 +4964,13 @@
             <a:prstDash val="solid"/>
           </a:ln>
         </p:spPr>
+        <p:txBody>
+          <a:bodyPr/>
+          <a:lstStyle/>
+          <a:p>
+            <a:endParaRPr lang="de-CH"/>
+          </a:p>
+        </p:txBody>
       </p:sp>
       <p:sp>
         <p:nvSpPr>
@@ -5024,7 +4993,7 @@
           <a:bodyPr wrap="square" lIns="0" tIns="0" rIns="0" bIns="0" rtlCol="0" anchor="ctr"/>
           <a:lstStyle/>
           <a:p>
-            <a:pPr algn="ctr" indent="0" marL="0">
+            <a:pPr marL="0" indent="0" algn="ctr">
               <a:buNone/>
             </a:pPr>
             <a:r>
@@ -5063,7 +5032,7 @@
           <a:bodyPr wrap="square" lIns="0" tIns="0" rIns="0" bIns="0" rtlCol="0" anchor="ctr"/>
           <a:lstStyle/>
           <a:p>
-            <a:pPr indent="0" marL="0">
+            <a:pPr marL="0" indent="0">
               <a:buNone/>
             </a:pPr>
             <a:r>
@@ -5102,7 +5071,7 @@
           <a:bodyPr wrap="square" lIns="0" tIns="0" rIns="0" bIns="0" rtlCol="0" anchor="ctr"/>
           <a:lstStyle/>
           <a:p>
-            <a:pPr indent="0" marL="0">
+            <a:pPr marL="0" indent="0">
               <a:buNone/>
             </a:pPr>
             <a:r>
@@ -5146,6 +5115,13 @@
             <a:prstDash val="solid"/>
           </a:ln>
         </p:spPr>
+        <p:txBody>
+          <a:bodyPr/>
+          <a:lstStyle/>
+          <a:p>
+            <a:endParaRPr lang="de-CH"/>
+          </a:p>
+        </p:txBody>
       </p:sp>
       <p:sp>
         <p:nvSpPr>
@@ -5168,7 +5144,7 @@
           <a:bodyPr wrap="square" lIns="0" tIns="0" rIns="0" bIns="0" rtlCol="0" anchor="ctr"/>
           <a:lstStyle/>
           <a:p>
-            <a:pPr algn="ctr" indent="0" marL="0">
+            <a:pPr marL="0" indent="0" algn="ctr">
               <a:buNone/>
             </a:pPr>
             <a:r>
@@ -5207,7 +5183,7 @@
           <a:bodyPr wrap="square" lIns="0" tIns="0" rIns="0" bIns="0" rtlCol="0" anchor="ctr"/>
           <a:lstStyle/>
           <a:p>
-            <a:pPr indent="0" marL="0">
+            <a:pPr marL="0" indent="0">
               <a:buNone/>
             </a:pPr>
             <a:r>
@@ -5246,7 +5222,7 @@
           <a:bodyPr wrap="square" lIns="0" tIns="0" rIns="0" bIns="0" rtlCol="0" anchor="ctr"/>
           <a:lstStyle/>
           <a:p>
-            <a:pPr indent="0" marL="0">
+            <a:pPr marL="0" indent="0">
               <a:buNone/>
             </a:pPr>
             <a:r>
@@ -5290,6 +5266,13 @@
             <a:prstDash val="solid"/>
           </a:ln>
         </p:spPr>
+        <p:txBody>
+          <a:bodyPr/>
+          <a:lstStyle/>
+          <a:p>
+            <a:endParaRPr lang="de-CH"/>
+          </a:p>
+        </p:txBody>
       </p:sp>
       <p:sp>
         <p:nvSpPr>
@@ -5312,7 +5295,7 @@
           <a:bodyPr wrap="square" lIns="0" tIns="0" rIns="0" bIns="0" rtlCol="0" anchor="ctr"/>
           <a:lstStyle/>
           <a:p>
-            <a:pPr algn="ctr" indent="0" marL="0">
+            <a:pPr marL="0" indent="0" algn="ctr">
               <a:buNone/>
             </a:pPr>
             <a:r>
@@ -5351,7 +5334,7 @@
           <a:bodyPr wrap="square" lIns="0" tIns="0" rIns="0" bIns="0" rtlCol="0" anchor="ctr"/>
           <a:lstStyle/>
           <a:p>
-            <a:pPr indent="0" marL="0">
+            <a:pPr marL="0" indent="0">
               <a:buNone/>
             </a:pPr>
             <a:r>
@@ -5390,7 +5373,7 @@
           <a:bodyPr wrap="square" lIns="0" tIns="0" rIns="0" bIns="0" rtlCol="0" anchor="ctr"/>
           <a:lstStyle/>
           <a:p>
-            <a:pPr indent="0" marL="0">
+            <a:pPr marL="0" indent="0">
               <a:buNone/>
             </a:pPr>
             <a:r>
@@ -5434,6 +5417,13 @@
             <a:prstDash val="solid"/>
           </a:ln>
         </p:spPr>
+        <p:txBody>
+          <a:bodyPr/>
+          <a:lstStyle/>
+          <a:p>
+            <a:endParaRPr lang="de-CH"/>
+          </a:p>
+        </p:txBody>
       </p:sp>
       <p:sp>
         <p:nvSpPr>
@@ -5456,7 +5446,7 @@
           <a:bodyPr wrap="square" lIns="0" tIns="0" rIns="0" bIns="0" rtlCol="0" anchor="ctr"/>
           <a:lstStyle/>
           <a:p>
-            <a:pPr algn="ctr" indent="0" marL="0">
+            <a:pPr marL="0" indent="0" algn="ctr">
               <a:buNone/>
             </a:pPr>
             <a:r>
@@ -5495,7 +5485,7 @@
           <a:bodyPr wrap="square" lIns="0" tIns="0" rIns="0" bIns="0" rtlCol="0" anchor="ctr"/>
           <a:lstStyle/>
           <a:p>
-            <a:pPr indent="0" marL="0">
+            <a:pPr marL="0" indent="0">
               <a:buNone/>
             </a:pPr>
             <a:r>
@@ -5534,7 +5524,7 @@
           <a:bodyPr wrap="square" lIns="0" tIns="0" rIns="0" bIns="0" rtlCol="0" anchor="ctr"/>
           <a:lstStyle/>
           <a:p>
-            <a:pPr indent="0" marL="0">
+            <a:pPr marL="0" indent="0">
               <a:buNone/>
             </a:pPr>
             <a:r>
@@ -5573,11 +5563,11 @@
           <a:bodyPr wrap="square" rtlCol="0" anchor="ctr"/>
           <a:lstStyle/>
           <a:p>
-            <a:pPr indent="0" marL="0">
-              <a:buNone/>
-            </a:pPr>
-            <a:r>
-              <a:rPr lang="en-US" sz="900" spc="200" kern="0" dirty="0">
+            <a:pPr marL="0" indent="0">
+              <a:buNone/>
+            </a:pPr>
+            <a:r>
+              <a:rPr lang="en-US" sz="900" kern="0" spc="200" dirty="0">
                 <a:solidFill>
                   <a:srgbClr val="7A8A95"/>
                 </a:solidFill>
@@ -5612,7 +5602,7 @@
           <a:bodyPr wrap="square" rtlCol="0" anchor="ctr"/>
           <a:lstStyle/>
           <a:p>
-            <a:pPr algn="r" indent="0" marL="0">
+            <a:pPr marL="0" indent="0" algn="r">
               <a:buNone/>
             </a:pPr>
             <a:r>
@@ -5646,6 +5636,7 @@
         <a:solidFill>
           <a:srgbClr val="12828C"/>
         </a:solidFill>
+        <a:effectLst/>
       </p:bgPr>
     </p:bg>
     <p:spTree>
@@ -5670,7 +5661,7 @@
         </p:nvSpPr>
         <p:spPr>
           <a:xfrm>
-            <a:off x="548640" y="1188720"/>
+            <a:off x="548640" y="480060"/>
             <a:ext cx="8046720" cy="365760"/>
           </a:xfrm>
           <a:prstGeom prst="rect">
@@ -5683,11 +5674,11 @@
           <a:bodyPr wrap="square" rtlCol="0" anchor="ctr"/>
           <a:lstStyle/>
           <a:p>
-            <a:pPr algn="ctr" indent="0" marL="0">
-              <a:buNone/>
-            </a:pPr>
-            <a:r>
-              <a:rPr lang="en-US" sz="1100" b="1" spc="400" kern="0" dirty="0">
+            <a:pPr marL="0" indent="0" algn="ctr">
+              <a:buNone/>
+            </a:pPr>
+            <a:r>
+              <a:rPr lang="en-US" sz="1100" b="1" kern="0" spc="400" dirty="0">
                 <a:solidFill>
                   <a:srgbClr val="DC822E"/>
                 </a:solidFill>
@@ -5709,7 +5700,7 @@
         </p:nvSpPr>
         <p:spPr>
           <a:xfrm>
-            <a:off x="4297680" y="1691640"/>
+            <a:off x="4297680" y="853609"/>
             <a:ext cx="548640" cy="36576"/>
           </a:xfrm>
           <a:prstGeom prst="rect">
@@ -5727,6 +5718,13 @@
             <a:prstDash val="solid"/>
           </a:ln>
         </p:spPr>
+        <p:txBody>
+          <a:bodyPr/>
+          <a:lstStyle/>
+          <a:p>
+            <a:endParaRPr lang="de-CH"/>
+          </a:p>
+        </p:txBody>
       </p:sp>
       <p:sp>
         <p:nvSpPr>
@@ -5736,7 +5734,7 @@
         </p:nvSpPr>
         <p:spPr>
           <a:xfrm>
-            <a:off x="548640" y="2011680"/>
+            <a:off x="548640" y="1709165"/>
             <a:ext cx="8046720" cy="2286000"/>
           </a:xfrm>
           <a:prstGeom prst="rect">
@@ -5749,7 +5747,7 @@
           <a:bodyPr wrap="square" lIns="0" tIns="0" rIns="0" bIns="0" rtlCol="0" anchor="ctr"/>
           <a:lstStyle/>
           <a:p>
-            <a:pPr algn="ctr" indent="0" marL="0">
+            <a:pPr marL="0" indent="0" algn="ctr">
               <a:buNone/>
             </a:pPr>
             <a:r>
@@ -5766,7 +5764,7 @@
             <a:endParaRPr lang="en-US" sz="3600" dirty="0"/>
           </a:p>
           <a:p>
-            <a:pPr algn="ctr" indent="0" marL="0">
+            <a:pPr marL="0" indent="0" algn="ctr">
               <a:buNone/>
             </a:pPr>
             <a:r>
@@ -5783,7 +5781,7 @@
             <a:endParaRPr lang="en-US" sz="3600" dirty="0"/>
           </a:p>
           <a:p>
-            <a:pPr algn="ctr" indent="0" marL="0">
+            <a:pPr marL="0" indent="0" algn="ctr">
               <a:buNone/>
             </a:pPr>
             <a:r>
@@ -5800,7 +5798,7 @@
             <a:endParaRPr lang="en-US" sz="3600" dirty="0"/>
           </a:p>
           <a:p>
-            <a:pPr algn="ctr" indent="0" marL="0">
+            <a:pPr marL="0" indent="0" algn="ctr">
               <a:buNone/>
             </a:pPr>
             <a:r>
@@ -5839,11 +5837,11 @@
           <a:bodyPr wrap="square" rtlCol="0" anchor="ctr"/>
           <a:lstStyle/>
           <a:p>
-            <a:pPr indent="0" marL="0">
-              <a:buNone/>
-            </a:pPr>
-            <a:r>
-              <a:rPr lang="en-US" sz="900" spc="200" kern="0" dirty="0">
+            <a:pPr marL="0" indent="0">
+              <a:buNone/>
+            </a:pPr>
+            <a:r>
+              <a:rPr lang="en-US" sz="900" kern="0" spc="200" dirty="0">
                 <a:solidFill>
                   <a:srgbClr val="F1ECDD"/>
                 </a:solidFill>
@@ -5878,7 +5876,7 @@
           <a:bodyPr wrap="square" rtlCol="0" anchor="ctr"/>
           <a:lstStyle/>
           <a:p>
-            <a:pPr algn="r" indent="0" marL="0">
+            <a:pPr marL="0" indent="0" algn="r">
               <a:buNone/>
             </a:pPr>
             <a:r>
@@ -5912,6 +5910,7 @@
         <a:solidFill>
           <a:srgbClr val="FFFFFF"/>
         </a:solidFill>
+        <a:effectLst/>
       </p:bgPr>
     </p:bg>
     <p:spTree>
@@ -5949,11 +5948,11 @@
           <a:bodyPr wrap="square" rtlCol="0" anchor="ctr"/>
           <a:lstStyle/>
           <a:p>
-            <a:pPr indent="0" marL="0">
-              <a:buNone/>
-            </a:pPr>
-            <a:r>
-              <a:rPr lang="en-US" sz="1000" b="1" spc="400" kern="0" dirty="0">
+            <a:pPr marL="0" indent="0">
+              <a:buNone/>
+            </a:pPr>
+            <a:r>
+              <a:rPr lang="en-US" sz="1000" b="1" kern="0" spc="400" dirty="0">
                 <a:solidFill>
                   <a:srgbClr val="DC822E"/>
                 </a:solidFill>
@@ -5988,7 +5987,7 @@
           <a:bodyPr wrap="square" lIns="0" tIns="0" rIns="0" bIns="0" rtlCol="0" anchor="t"/>
           <a:lstStyle/>
           <a:p>
-            <a:pPr indent="0" marL="0">
+            <a:pPr marL="0" indent="0">
               <a:buNone/>
             </a:pPr>
             <a:r>
@@ -6014,7 +6013,7 @@
         </p:nvSpPr>
         <p:spPr>
           <a:xfrm>
-            <a:off x="548640" y="1920240"/>
+            <a:off x="548640" y="2011680"/>
             <a:ext cx="5120640" cy="2194560"/>
           </a:xfrm>
           <a:prstGeom prst="rect">
@@ -6159,6 +6158,13 @@
             <a:prstDash val="solid"/>
           </a:ln>
         </p:spPr>
+        <p:txBody>
+          <a:bodyPr/>
+          <a:lstStyle/>
+          <a:p>
+            <a:endParaRPr lang="de-CH"/>
+          </a:p>
+        </p:txBody>
       </p:sp>
       <p:sp>
         <p:nvSpPr>
@@ -6186,6 +6192,13 @@
             <a:prstDash val="solid"/>
           </a:ln>
         </p:spPr>
+        <p:txBody>
+          <a:bodyPr/>
+          <a:lstStyle/>
+          <a:p>
+            <a:endParaRPr lang="de-CH"/>
+          </a:p>
+        </p:txBody>
       </p:sp>
       <p:sp>
         <p:nvSpPr>
@@ -6208,11 +6221,11 @@
           <a:bodyPr wrap="square" rtlCol="0" anchor="ctr"/>
           <a:lstStyle/>
           <a:p>
-            <a:pPr indent="0" marL="0">
-              <a:buNone/>
-            </a:pPr>
-            <a:r>
-              <a:rPr lang="en-US" sz="900" b="1" spc="400" kern="0" dirty="0">
+            <a:pPr marL="0" indent="0">
+              <a:buNone/>
+            </a:pPr>
+            <a:r>
+              <a:rPr lang="en-US" sz="900" b="1" kern="0" spc="400" dirty="0">
                 <a:solidFill>
                   <a:srgbClr val="DC822E"/>
                 </a:solidFill>
@@ -6247,7 +6260,7 @@
           <a:bodyPr wrap="square" lIns="0" tIns="0" rIns="0" bIns="0" rtlCol="0" anchor="t"/>
           <a:lstStyle/>
           <a:p>
-            <a:pPr indent="0" marL="0">
+            <a:pPr marL="0" indent="0">
               <a:buNone/>
             </a:pPr>
             <a:r>
@@ -6259,7 +6272,51 @@
                 <a:ea typeface="Georgia" pitchFamily="34" charset="-122"/>
                 <a:cs typeface="Georgia" pitchFamily="34" charset="-120"/>
               </a:rPr>
-              <a:t>„Vielleicht hast du auch ‚Reitlehrerin für meine Tochter' oder ‚Hauptverantwortliche im Family Trust'. Alles zählt."</a:t>
+              <a:t>„Vielleicht hast du auch ‚Reitlehrerin für </a:t>
+            </a:r>
+            <a:r>
+              <a:rPr lang="en-US" sz="1400" i="1" dirty="0" err="1">
+                <a:solidFill>
+                  <a:srgbClr val="0D6168"/>
+                </a:solidFill>
+                <a:latin typeface="Georgia" pitchFamily="34" charset="0"/>
+                <a:ea typeface="Georgia" pitchFamily="34" charset="-122"/>
+                <a:cs typeface="Georgia" pitchFamily="34" charset="-120"/>
+              </a:rPr>
+              <a:t>meine</a:t>
+            </a:r>
+            <a:r>
+              <a:rPr lang="en-US" sz="1400" i="1" dirty="0">
+                <a:solidFill>
+                  <a:srgbClr val="0D6168"/>
+                </a:solidFill>
+                <a:latin typeface="Georgia" pitchFamily="34" charset="0"/>
+                <a:ea typeface="Georgia" pitchFamily="34" charset="-122"/>
+                <a:cs typeface="Georgia" pitchFamily="34" charset="-120"/>
+              </a:rPr>
+              <a:t> </a:t>
+            </a:r>
+            <a:r>
+              <a:rPr lang="en-US" sz="1400" i="1" dirty="0" err="1">
+                <a:solidFill>
+                  <a:srgbClr val="0D6168"/>
+                </a:solidFill>
+                <a:latin typeface="Georgia" pitchFamily="34" charset="0"/>
+                <a:ea typeface="Georgia" pitchFamily="34" charset="-122"/>
+                <a:cs typeface="Georgia" pitchFamily="34" charset="-120"/>
+              </a:rPr>
+              <a:t>Tochter</a:t>
+            </a:r>
+            <a:r>
+              <a:rPr lang="en-US" sz="1400" i="1" dirty="0">
+                <a:solidFill>
+                  <a:srgbClr val="0D6168"/>
+                </a:solidFill>
+                <a:latin typeface="Georgia" pitchFamily="34" charset="0"/>
+                <a:ea typeface="Georgia" pitchFamily="34" charset="-122"/>
+                <a:cs typeface="Georgia" pitchFamily="34" charset="-120"/>
+              </a:rPr>
+              <a:t>’. Alles zählt."</a:t>
             </a:r>
             <a:endParaRPr lang="en-US" sz="1400" dirty="0"/>
           </a:p>
@@ -6286,11 +6343,11 @@
           <a:bodyPr wrap="square" rtlCol="0" anchor="ctr"/>
           <a:lstStyle/>
           <a:p>
-            <a:pPr indent="0" marL="0">
-              <a:buNone/>
-            </a:pPr>
-            <a:r>
-              <a:rPr lang="en-US" sz="900" spc="200" kern="0" dirty="0">
+            <a:pPr marL="0" indent="0">
+              <a:buNone/>
+            </a:pPr>
+            <a:r>
+              <a:rPr lang="en-US" sz="900" kern="0" spc="200" dirty="0">
                 <a:solidFill>
                   <a:srgbClr val="7A8A95"/>
                 </a:solidFill>
@@ -6325,7 +6382,7 @@
           <a:bodyPr wrap="square" rtlCol="0" anchor="ctr"/>
           <a:lstStyle/>
           <a:p>
-            <a:pPr algn="r" indent="0" marL="0">
+            <a:pPr marL="0" indent="0" algn="r">
               <a:buNone/>
             </a:pPr>
             <a:r>
@@ -6359,6 +6416,7 @@
         <a:solidFill>
           <a:srgbClr val="12828C"/>
         </a:solidFill>
+        <a:effectLst/>
       </p:bgPr>
     </p:bg>
     <p:spTree>
@@ -6396,11 +6454,11 @@
           <a:bodyPr wrap="square" rtlCol="0" anchor="ctr"/>
           <a:lstStyle/>
           <a:p>
-            <a:pPr algn="ctr" indent="0" marL="0">
-              <a:buNone/>
-            </a:pPr>
-            <a:r>
-              <a:rPr lang="en-US" sz="1100" b="1" spc="400" kern="0" dirty="0">
+            <a:pPr marL="0" indent="0" algn="ctr">
+              <a:buNone/>
+            </a:pPr>
+            <a:r>
+              <a:rPr lang="en-US" sz="1100" b="1" kern="0" spc="400" dirty="0">
                 <a:solidFill>
                   <a:srgbClr val="DC822E"/>
                 </a:solidFill>
@@ -6440,6 +6498,13 @@
             <a:prstDash val="solid"/>
           </a:ln>
         </p:spPr>
+        <p:txBody>
+          <a:bodyPr/>
+          <a:lstStyle/>
+          <a:p>
+            <a:endParaRPr lang="de-CH"/>
+          </a:p>
+        </p:txBody>
       </p:sp>
       <p:sp>
         <p:nvSpPr>
@@ -6462,7 +6527,7 @@
           <a:bodyPr wrap="square" lIns="0" tIns="0" rIns="0" bIns="0" rtlCol="0" anchor="ctr"/>
           <a:lstStyle/>
           <a:p>
-            <a:pPr algn="ctr" indent="0" marL="0">
+            <a:pPr marL="0" indent="0" algn="ctr">
               <a:buNone/>
             </a:pPr>
             <a:r>
@@ -6479,7 +6544,7 @@
             <a:endParaRPr lang="en-US" sz="3600" dirty="0"/>
           </a:p>
           <a:p>
-            <a:pPr algn="ctr" indent="0" marL="0">
+            <a:pPr marL="0" indent="0" algn="ctr">
               <a:buNone/>
             </a:pPr>
             <a:r>
@@ -6496,7 +6561,7 @@
             <a:endParaRPr lang="en-US" sz="3600" dirty="0"/>
           </a:p>
           <a:p>
-            <a:pPr algn="ctr" indent="0" marL="0">
+            <a:pPr marL="0" indent="0" algn="ctr">
               <a:buNone/>
             </a:pPr>
             <a:r>
@@ -6535,11 +6600,11 @@
           <a:bodyPr wrap="square" rtlCol="0" anchor="ctr"/>
           <a:lstStyle/>
           <a:p>
-            <a:pPr indent="0" marL="0">
-              <a:buNone/>
-            </a:pPr>
-            <a:r>
-              <a:rPr lang="en-US" sz="900" spc="200" kern="0" dirty="0">
+            <a:pPr marL="0" indent="0">
+              <a:buNone/>
+            </a:pPr>
+            <a:r>
+              <a:rPr lang="en-US" sz="900" kern="0" spc="200" dirty="0">
                 <a:solidFill>
                   <a:srgbClr val="F1ECDD"/>
                 </a:solidFill>
@@ -6574,7 +6639,7 @@
           <a:bodyPr wrap="square" rtlCol="0" anchor="ctr"/>
           <a:lstStyle/>
           <a:p>
-            <a:pPr algn="r" indent="0" marL="0">
+            <a:pPr marL="0" indent="0" algn="r">
               <a:buNone/>
             </a:pPr>
             <a:r>
@@ -6608,6 +6673,7 @@
         <a:solidFill>
           <a:srgbClr val="FFFFFF"/>
         </a:solidFill>
+        <a:effectLst/>
       </p:bgPr>
     </p:bg>
     <p:spTree>
@@ -6645,7 +6711,7 @@
           <a:bodyPr wrap="square" lIns="0" tIns="0" rIns="0" bIns="0" rtlCol="0" anchor="t"/>
           <a:lstStyle/>
           <a:p>
-            <a:pPr indent="0" marL="0">
+            <a:pPr marL="0" indent="0">
               <a:buNone/>
             </a:pPr>
             <a:r>
@@ -6684,7 +6750,7 @@
           <a:bodyPr wrap="square" rtlCol="0" anchor="ctr"/>
           <a:lstStyle/>
           <a:p>
-            <a:pPr indent="0" marL="0">
+            <a:pPr marL="0" indent="0">
               <a:buNone/>
             </a:pPr>
             <a:r>
@@ -6728,6 +6794,13 @@
             <a:prstDash val="solid"/>
           </a:ln>
         </p:spPr>
+        <p:txBody>
+          <a:bodyPr/>
+          <a:lstStyle/>
+          <a:p>
+            <a:endParaRPr lang="de-CH"/>
+          </a:p>
+        </p:txBody>
       </p:sp>
       <p:sp>
         <p:nvSpPr>
@@ -6750,7 +6823,7 @@
           <a:bodyPr wrap="square" lIns="0" tIns="0" rIns="0" bIns="0" rtlCol="0" anchor="ctr"/>
           <a:lstStyle/>
           <a:p>
-            <a:pPr algn="ctr" indent="0" marL="0">
+            <a:pPr marL="0" indent="0" algn="ctr">
               <a:buNone/>
             </a:pPr>
             <a:r>
@@ -6789,7 +6862,7 @@
           <a:bodyPr wrap="square" lIns="0" tIns="0" rIns="0" bIns="0" rtlCol="0" anchor="ctr"/>
           <a:lstStyle/>
           <a:p>
-            <a:pPr indent="0" marL="0">
+            <a:pPr marL="0" indent="0">
               <a:buNone/>
             </a:pPr>
             <a:r>
@@ -6828,7 +6901,7 @@
           <a:bodyPr wrap="square" lIns="0" tIns="0" rIns="0" bIns="0" rtlCol="0" anchor="ctr"/>
           <a:lstStyle/>
           <a:p>
-            <a:pPr indent="0" marL="0">
+            <a:pPr marL="0" indent="0">
               <a:buNone/>
             </a:pPr>
             <a:r>
@@ -6872,6 +6945,13 @@
             <a:prstDash val="solid"/>
           </a:ln>
         </p:spPr>
+        <p:txBody>
+          <a:bodyPr/>
+          <a:lstStyle/>
+          <a:p>
+            <a:endParaRPr lang="de-CH"/>
+          </a:p>
+        </p:txBody>
       </p:sp>
       <p:sp>
         <p:nvSpPr>
@@ -6894,7 +6974,7 @@
           <a:bodyPr wrap="square" lIns="0" tIns="0" rIns="0" bIns="0" rtlCol="0" anchor="ctr"/>
           <a:lstStyle/>
           <a:p>
-            <a:pPr algn="ctr" indent="0" marL="0">
+            <a:pPr marL="0" indent="0" algn="ctr">
               <a:buNone/>
             </a:pPr>
             <a:r>
@@ -6933,7 +7013,7 @@
           <a:bodyPr wrap="square" lIns="0" tIns="0" rIns="0" bIns="0" rtlCol="0" anchor="ctr"/>
           <a:lstStyle/>
           <a:p>
-            <a:pPr indent="0" marL="0">
+            <a:pPr marL="0" indent="0">
               <a:buNone/>
             </a:pPr>
             <a:r>
@@ -6972,7 +7052,7 @@
           <a:bodyPr wrap="square" lIns="0" tIns="0" rIns="0" bIns="0" rtlCol="0" anchor="ctr"/>
           <a:lstStyle/>
           <a:p>
-            <a:pPr indent="0" marL="0">
+            <a:pPr marL="0" indent="0">
               <a:buNone/>
             </a:pPr>
             <a:r>
@@ -7016,6 +7096,13 @@
             <a:prstDash val="solid"/>
           </a:ln>
         </p:spPr>
+        <p:txBody>
+          <a:bodyPr/>
+          <a:lstStyle/>
+          <a:p>
+            <a:endParaRPr lang="de-CH"/>
+          </a:p>
+        </p:txBody>
       </p:sp>
       <p:sp>
         <p:nvSpPr>
@@ -7038,7 +7125,7 @@
           <a:bodyPr wrap="square" lIns="0" tIns="0" rIns="0" bIns="0" rtlCol="0" anchor="ctr"/>
           <a:lstStyle/>
           <a:p>
-            <a:pPr algn="ctr" indent="0" marL="0">
+            <a:pPr marL="0" indent="0" algn="ctr">
               <a:buNone/>
             </a:pPr>
             <a:r>
@@ -7077,7 +7164,7 @@
           <a:bodyPr wrap="square" lIns="0" tIns="0" rIns="0" bIns="0" rtlCol="0" anchor="ctr"/>
           <a:lstStyle/>
           <a:p>
-            <a:pPr indent="0" marL="0">
+            <a:pPr marL="0" indent="0">
               <a:buNone/>
             </a:pPr>
             <a:r>
@@ -7116,7 +7203,7 @@
           <a:bodyPr wrap="square" lIns="0" tIns="0" rIns="0" bIns="0" rtlCol="0" anchor="ctr"/>
           <a:lstStyle/>
           <a:p>
-            <a:pPr indent="0" marL="0">
+            <a:pPr marL="0" indent="0">
               <a:buNone/>
             </a:pPr>
             <a:r>
@@ -7160,6 +7247,13 @@
             <a:prstDash val="solid"/>
           </a:ln>
         </p:spPr>
+        <p:txBody>
+          <a:bodyPr/>
+          <a:lstStyle/>
+          <a:p>
+            <a:endParaRPr lang="de-CH"/>
+          </a:p>
+        </p:txBody>
       </p:sp>
       <p:sp>
         <p:nvSpPr>
@@ -7182,7 +7276,7 @@
           <a:bodyPr wrap="square" lIns="0" tIns="0" rIns="0" bIns="0" rtlCol="0" anchor="ctr"/>
           <a:lstStyle/>
           <a:p>
-            <a:pPr algn="ctr" indent="0" marL="0">
+            <a:pPr marL="0" indent="0" algn="ctr">
               <a:buNone/>
             </a:pPr>
             <a:r>
@@ -7221,7 +7315,7 @@
           <a:bodyPr wrap="square" lIns="0" tIns="0" rIns="0" bIns="0" rtlCol="0" anchor="ctr"/>
           <a:lstStyle/>
           <a:p>
-            <a:pPr indent="0" marL="0">
+            <a:pPr marL="0" indent="0">
               <a:buNone/>
             </a:pPr>
             <a:r>
@@ -7260,7 +7354,7 @@
           <a:bodyPr wrap="square" lIns="0" tIns="0" rIns="0" bIns="0" rtlCol="0" anchor="ctr"/>
           <a:lstStyle/>
           <a:p>
-            <a:pPr indent="0" marL="0">
+            <a:pPr marL="0" indent="0">
               <a:buNone/>
             </a:pPr>
             <a:r>
@@ -7304,6 +7398,13 @@
             <a:prstDash val="solid"/>
           </a:ln>
         </p:spPr>
+        <p:txBody>
+          <a:bodyPr/>
+          <a:lstStyle/>
+          <a:p>
+            <a:endParaRPr lang="de-CH"/>
+          </a:p>
+        </p:txBody>
       </p:sp>
       <p:sp>
         <p:nvSpPr>
@@ -7326,7 +7427,7 @@
           <a:bodyPr wrap="square" lIns="0" tIns="0" rIns="0" bIns="0" rtlCol="0" anchor="ctr"/>
           <a:lstStyle/>
           <a:p>
-            <a:pPr algn="ctr" indent="0" marL="0">
+            <a:pPr marL="0" indent="0" algn="ctr">
               <a:buNone/>
             </a:pPr>
             <a:r>
@@ -7365,7 +7466,7 @@
           <a:bodyPr wrap="square" lIns="0" tIns="0" rIns="0" bIns="0" rtlCol="0" anchor="ctr"/>
           <a:lstStyle/>
           <a:p>
-            <a:pPr indent="0" marL="0">
+            <a:pPr marL="0" indent="0">
               <a:buNone/>
             </a:pPr>
             <a:r>
@@ -7404,7 +7505,7 @@
           <a:bodyPr wrap="square" lIns="0" tIns="0" rIns="0" bIns="0" rtlCol="0" anchor="ctr"/>
           <a:lstStyle/>
           <a:p>
-            <a:pPr indent="0" marL="0">
+            <a:pPr marL="0" indent="0">
               <a:buNone/>
             </a:pPr>
             <a:r>
@@ -7443,11 +7544,11 @@
           <a:bodyPr wrap="square" rtlCol="0" anchor="ctr"/>
           <a:lstStyle/>
           <a:p>
-            <a:pPr indent="0" marL="0">
-              <a:buNone/>
-            </a:pPr>
-            <a:r>
-              <a:rPr lang="en-US" sz="900" spc="200" kern="0" dirty="0">
+            <a:pPr marL="0" indent="0">
+              <a:buNone/>
+            </a:pPr>
+            <a:r>
+              <a:rPr lang="en-US" sz="900" kern="0" spc="200" dirty="0">
                 <a:solidFill>
                   <a:srgbClr val="7A8A95"/>
                 </a:solidFill>
@@ -7482,7 +7583,7 @@
           <a:bodyPr wrap="square" rtlCol="0" anchor="ctr"/>
           <a:lstStyle/>
           <a:p>
-            <a:pPr algn="r" indent="0" marL="0">
+            <a:pPr marL="0" indent="0" algn="r">
               <a:buNone/>
             </a:pPr>
             <a:r>
@@ -7516,6 +7617,7 @@
         <a:solidFill>
           <a:srgbClr val="12828C"/>
         </a:solidFill>
+        <a:effectLst/>
       </p:bgPr>
     </p:bg>
     <p:spTree>
@@ -7540,7 +7642,7 @@
         </p:nvSpPr>
         <p:spPr>
           <a:xfrm>
-            <a:off x="548640" y="1188720"/>
+            <a:off x="640080" y="480060"/>
             <a:ext cx="8046720" cy="365760"/>
           </a:xfrm>
           <a:prstGeom prst="rect">
@@ -7553,11 +7655,11 @@
           <a:bodyPr wrap="square" rtlCol="0" anchor="ctr"/>
           <a:lstStyle/>
           <a:p>
-            <a:pPr algn="ctr" indent="0" marL="0">
-              <a:buNone/>
-            </a:pPr>
-            <a:r>
-              <a:rPr lang="en-US" sz="1100" b="1" spc="400" kern="0" dirty="0">
+            <a:pPr marL="0" indent="0" algn="ctr">
+              <a:buNone/>
+            </a:pPr>
+            <a:r>
+              <a:rPr lang="en-US" sz="1100" b="1" kern="0" spc="400" dirty="0">
                 <a:solidFill>
                   <a:srgbClr val="DC822E"/>
                 </a:solidFill>
@@ -7579,7 +7681,7 @@
         </p:nvSpPr>
         <p:spPr>
           <a:xfrm>
-            <a:off x="4297680" y="1691640"/>
+            <a:off x="4297680" y="830580"/>
             <a:ext cx="548640" cy="36576"/>
           </a:xfrm>
           <a:prstGeom prst="rect">
@@ -7597,6 +7699,13 @@
             <a:prstDash val="solid"/>
           </a:ln>
         </p:spPr>
+        <p:txBody>
+          <a:bodyPr/>
+          <a:lstStyle/>
+          <a:p>
+            <a:endParaRPr lang="de-CH"/>
+          </a:p>
+        </p:txBody>
       </p:sp>
       <p:sp>
         <p:nvSpPr>
@@ -7606,7 +7715,7 @@
         </p:nvSpPr>
         <p:spPr>
           <a:xfrm>
-            <a:off x="548640" y="2011680"/>
+            <a:off x="548640" y="1669542"/>
             <a:ext cx="8046720" cy="2286000"/>
           </a:xfrm>
           <a:prstGeom prst="rect">
@@ -7619,7 +7728,7 @@
           <a:bodyPr wrap="square" lIns="0" tIns="0" rIns="0" bIns="0" rtlCol="0" anchor="ctr"/>
           <a:lstStyle/>
           <a:p>
-            <a:pPr algn="ctr" indent="0" marL="0">
+            <a:pPr marL="0" indent="0" algn="ctr">
               <a:buNone/>
             </a:pPr>
             <a:r>
@@ -7636,7 +7745,7 @@
             <a:endParaRPr lang="en-US" sz="3600" dirty="0"/>
           </a:p>
           <a:p>
-            <a:pPr algn="ctr" indent="0" marL="0">
+            <a:pPr marL="0" indent="0" algn="ctr">
               <a:buNone/>
             </a:pPr>
             <a:r>
@@ -7653,7 +7762,7 @@
             <a:endParaRPr lang="en-US" sz="3600" dirty="0"/>
           </a:p>
           <a:p>
-            <a:pPr algn="ctr" indent="0" marL="0">
+            <a:pPr marL="0" indent="0" algn="ctr">
               <a:buNone/>
             </a:pPr>
             <a:r>
@@ -7670,7 +7779,7 @@
             <a:endParaRPr lang="en-US" sz="3600" dirty="0"/>
           </a:p>
           <a:p>
-            <a:pPr algn="ctr" indent="0" marL="0">
+            <a:pPr marL="0" indent="0" algn="ctr">
               <a:buNone/>
             </a:pPr>
             <a:r>
@@ -7709,11 +7818,11 @@
           <a:bodyPr wrap="square" rtlCol="0" anchor="ctr"/>
           <a:lstStyle/>
           <a:p>
-            <a:pPr indent="0" marL="0">
-              <a:buNone/>
-            </a:pPr>
-            <a:r>
-              <a:rPr lang="en-US" sz="900" spc="200" kern="0" dirty="0">
+            <a:pPr marL="0" indent="0">
+              <a:buNone/>
+            </a:pPr>
+            <a:r>
+              <a:rPr lang="en-US" sz="900" kern="0" spc="200" dirty="0">
                 <a:solidFill>
                   <a:srgbClr val="F1ECDD"/>
                 </a:solidFill>
@@ -7748,7 +7857,7 @@
           <a:bodyPr wrap="square" rtlCol="0" anchor="ctr"/>
           <a:lstStyle/>
           <a:p>
-            <a:pPr algn="r" indent="0" marL="0">
+            <a:pPr marL="0" indent="0" algn="r">
               <a:buNone/>
             </a:pPr>
             <a:r>
@@ -8067,4 +8176,319 @@
     </a:ext>
   </a:extLst>
 </a:theme>
+</file>
+
+<file path=ppt/theme/theme2.xml><?xml version="1.0" encoding="utf-8"?>
+<a:theme xmlns:a="http://schemas.openxmlformats.org/drawingml/2006/main" name="Office">
+  <a:themeElements>
+    <a:clrScheme name="Office">
+      <a:dk1>
+        <a:sysClr val="windowText" lastClr="000000"/>
+      </a:dk1>
+      <a:lt1>
+        <a:sysClr val="window" lastClr="FFFFFF"/>
+      </a:lt1>
+      <a:dk2>
+        <a:srgbClr val="0E2841"/>
+      </a:dk2>
+      <a:lt2>
+        <a:srgbClr val="E8E8E8"/>
+      </a:lt2>
+      <a:accent1>
+        <a:srgbClr val="156082"/>
+      </a:accent1>
+      <a:accent2>
+        <a:srgbClr val="E97132"/>
+      </a:accent2>
+      <a:accent3>
+        <a:srgbClr val="196B24"/>
+      </a:accent3>
+      <a:accent4>
+        <a:srgbClr val="0F9ED5"/>
+      </a:accent4>
+      <a:accent5>
+        <a:srgbClr val="A02B93"/>
+      </a:accent5>
+      <a:accent6>
+        <a:srgbClr val="4EA72E"/>
+      </a:accent6>
+      <a:hlink>
+        <a:srgbClr val="467886"/>
+      </a:hlink>
+      <a:folHlink>
+        <a:srgbClr val="96607D"/>
+      </a:folHlink>
+    </a:clrScheme>
+    <a:fontScheme name="Office">
+      <a:majorFont>
+        <a:latin typeface="Aptos Display" panose="02110004020202020204"/>
+        <a:ea typeface=""/>
+        <a:cs typeface=""/>
+        <a:font script="Jpan" typeface="游ゴシック Light"/>
+        <a:font script="Hang" typeface="맑은 고딕"/>
+        <a:font script="Hans" typeface="等线 Light"/>
+        <a:font script="Hant" typeface="新細明體"/>
+        <a:font script="Arab" typeface="Times New Roman"/>
+        <a:font script="Hebr" typeface="Times New Roman"/>
+        <a:font script="Thai" typeface="Angsana New"/>
+        <a:font script="Ethi" typeface="Nyala"/>
+        <a:font script="Beng" typeface="Vrinda"/>
+        <a:font script="Gujr" typeface="Shruti"/>
+        <a:font script="Khmr" typeface="MoolBoran"/>
+        <a:font script="Knda" typeface="Tunga"/>
+        <a:font script="Guru" typeface="Raavi"/>
+        <a:font script="Cans" typeface="Euphemia"/>
+        <a:font script="Cher" typeface="Plantagenet Cherokee"/>
+        <a:font script="Yiii" typeface="Microsoft Yi Baiti"/>
+        <a:font script="Tibt" typeface="Microsoft Himalaya"/>
+        <a:font script="Thaa" typeface="MV Boli"/>
+        <a:font script="Deva" typeface="Mangal"/>
+        <a:font script="Telu" typeface="Gautami"/>
+        <a:font script="Taml" typeface="Latha"/>
+        <a:font script="Syrc" typeface="Estrangelo Edessa"/>
+        <a:font script="Orya" typeface="Kalinga"/>
+        <a:font script="Mlym" typeface="Kartika"/>
+        <a:font script="Laoo" typeface="DokChampa"/>
+        <a:font script="Sinh" typeface="Iskoola Pota"/>
+        <a:font script="Mong" typeface="Mongolian Baiti"/>
+        <a:font script="Viet" typeface="Times New Roman"/>
+        <a:font script="Uigh" typeface="Microsoft Uighur"/>
+        <a:font script="Geor" typeface="Sylfaen"/>
+        <a:font script="Armn" typeface="Arial"/>
+        <a:font script="Bugi" typeface="Leelawadee UI"/>
+        <a:font script="Bopo" typeface="Microsoft JhengHei"/>
+        <a:font script="Java" typeface="Javanese Text"/>
+        <a:font script="Lisu" typeface="Segoe UI"/>
+        <a:font script="Mymr" typeface="Myanmar Text"/>
+        <a:font script="Nkoo" typeface="Ebrima"/>
+        <a:font script="Olck" typeface="Nirmala UI"/>
+        <a:font script="Osma" typeface="Ebrima"/>
+        <a:font script="Phag" typeface="Phagspa"/>
+        <a:font script="Syrn" typeface="Estrangelo Edessa"/>
+        <a:font script="Syrj" typeface="Estrangelo Edessa"/>
+        <a:font script="Syre" typeface="Estrangelo Edessa"/>
+        <a:font script="Sora" typeface="Nirmala UI"/>
+        <a:font script="Tale" typeface="Microsoft Tai Le"/>
+        <a:font script="Talu" typeface="Microsoft New Tai Lue"/>
+        <a:font script="Tfng" typeface="Ebrima"/>
+      </a:majorFont>
+      <a:minorFont>
+        <a:latin typeface="Aptos" panose="02110004020202020204"/>
+        <a:ea typeface=""/>
+        <a:cs typeface=""/>
+        <a:font script="Jpan" typeface="游ゴシック"/>
+        <a:font script="Hang" typeface="맑은 고딕"/>
+        <a:font script="Hans" typeface="等线"/>
+        <a:font script="Hant" typeface="新細明體"/>
+        <a:font script="Arab" typeface="Arial"/>
+        <a:font script="Hebr" typeface="Arial"/>
+        <a:font script="Thai" typeface="Cordia New"/>
+        <a:font script="Ethi" typeface="Nyala"/>
+        <a:font script="Beng" typeface="Vrinda"/>
+        <a:font script="Gujr" typeface="Shruti"/>
+        <a:font script="Khmr" typeface="DaunPenh"/>
+        <a:font script="Knda" typeface="Tunga"/>
+        <a:font script="Guru" typeface="Raavi"/>
+        <a:font script="Cans" typeface="Euphemia"/>
+        <a:font script="Cher" typeface="Plantagenet Cherokee"/>
+        <a:font script="Yiii" typeface="Microsoft Yi Baiti"/>
+        <a:font script="Tibt" typeface="Microsoft Himalaya"/>
+        <a:font script="Thaa" typeface="MV Boli"/>
+        <a:font script="Deva" typeface="Mangal"/>
+        <a:font script="Telu" typeface="Gautami"/>
+        <a:font script="Taml" typeface="Latha"/>
+        <a:font script="Syrc" typeface="Estrangelo Edessa"/>
+        <a:font script="Orya" typeface="Kalinga"/>
+        <a:font script="Mlym" typeface="Kartika"/>
+        <a:font script="Laoo" typeface="DokChampa"/>
+        <a:font script="Sinh" typeface="Iskoola Pota"/>
+        <a:font script="Mong" typeface="Mongolian Baiti"/>
+        <a:font script="Viet" typeface="Arial"/>
+        <a:font script="Uigh" typeface="Microsoft Uighur"/>
+        <a:font script="Geor" typeface="Sylfaen"/>
+        <a:font script="Armn" typeface="Arial"/>
+        <a:font script="Bugi" typeface="Leelawadee UI"/>
+        <a:font script="Bopo" typeface="Microsoft JhengHei"/>
+        <a:font script="Java" typeface="Javanese Text"/>
+        <a:font script="Lisu" typeface="Segoe UI"/>
+        <a:font script="Mymr" typeface="Myanmar Text"/>
+        <a:font script="Nkoo" typeface="Ebrima"/>
+        <a:font script="Olck" typeface="Nirmala UI"/>
+        <a:font script="Osma" typeface="Ebrima"/>
+        <a:font script="Phag" typeface="Phagspa"/>
+        <a:font script="Syrn" typeface="Estrangelo Edessa"/>
+        <a:font script="Syrj" typeface="Estrangelo Edessa"/>
+        <a:font script="Syre" typeface="Estrangelo Edessa"/>
+        <a:font script="Sora" typeface="Nirmala UI"/>
+        <a:font script="Tale" typeface="Microsoft Tai Le"/>
+        <a:font script="Talu" typeface="Microsoft New Tai Lue"/>
+        <a:font script="Tfng" typeface="Ebrima"/>
+      </a:minorFont>
+    </a:fontScheme>
+    <a:fmtScheme name="Office">
+      <a:fillStyleLst>
+        <a:solidFill>
+          <a:schemeClr val="phClr"/>
+        </a:solidFill>
+        <a:gradFill rotWithShape="1">
+          <a:gsLst>
+            <a:gs pos="0">
+              <a:schemeClr val="phClr">
+                <a:lumMod val="110000"/>
+                <a:satMod val="105000"/>
+                <a:tint val="67000"/>
+              </a:schemeClr>
+            </a:gs>
+            <a:gs pos="50000">
+              <a:schemeClr val="phClr">
+                <a:lumMod val="105000"/>
+                <a:satMod val="103000"/>
+                <a:tint val="73000"/>
+              </a:schemeClr>
+            </a:gs>
+            <a:gs pos="100000">
+              <a:schemeClr val="phClr">
+                <a:lumMod val="105000"/>
+                <a:satMod val="109000"/>
+                <a:tint val="81000"/>
+              </a:schemeClr>
+            </a:gs>
+          </a:gsLst>
+          <a:lin ang="5400000" scaled="0"/>
+        </a:gradFill>
+        <a:gradFill rotWithShape="1">
+          <a:gsLst>
+            <a:gs pos="0">
+              <a:schemeClr val="phClr">
+                <a:satMod val="103000"/>
+                <a:lumMod val="102000"/>
+                <a:tint val="94000"/>
+              </a:schemeClr>
+            </a:gs>
+            <a:gs pos="50000">
+              <a:schemeClr val="phClr">
+                <a:satMod val="110000"/>
+                <a:lumMod val="100000"/>
+                <a:shade val="100000"/>
+              </a:schemeClr>
+            </a:gs>
+            <a:gs pos="100000">
+              <a:schemeClr val="phClr">
+                <a:lumMod val="99000"/>
+                <a:satMod val="120000"/>
+                <a:shade val="78000"/>
+              </a:schemeClr>
+            </a:gs>
+          </a:gsLst>
+          <a:lin ang="5400000" scaled="0"/>
+        </a:gradFill>
+      </a:fillStyleLst>
+      <a:lnStyleLst>
+        <a:ln w="12700" cap="flat" cmpd="sng" algn="ctr">
+          <a:solidFill>
+            <a:schemeClr val="phClr"/>
+          </a:solidFill>
+          <a:prstDash val="solid"/>
+          <a:miter lim="800000"/>
+        </a:ln>
+        <a:ln w="19050" cap="flat" cmpd="sng" algn="ctr">
+          <a:solidFill>
+            <a:schemeClr val="phClr"/>
+          </a:solidFill>
+          <a:prstDash val="solid"/>
+          <a:miter lim="800000"/>
+        </a:ln>
+        <a:ln w="25400" cap="flat" cmpd="sng" algn="ctr">
+          <a:solidFill>
+            <a:schemeClr val="phClr"/>
+          </a:solidFill>
+          <a:prstDash val="solid"/>
+          <a:miter lim="800000"/>
+        </a:ln>
+      </a:lnStyleLst>
+      <a:effectStyleLst>
+        <a:effectStyle>
+          <a:effectLst/>
+        </a:effectStyle>
+        <a:effectStyle>
+          <a:effectLst/>
+        </a:effectStyle>
+        <a:effectStyle>
+          <a:effectLst>
+            <a:outerShdw blurRad="57150" dist="19050" dir="5400000" algn="ctr" rotWithShape="0">
+              <a:srgbClr val="000000">
+                <a:alpha val="63000"/>
+              </a:srgbClr>
+            </a:outerShdw>
+          </a:effectLst>
+        </a:effectStyle>
+      </a:effectStyleLst>
+      <a:bgFillStyleLst>
+        <a:solidFill>
+          <a:schemeClr val="phClr"/>
+        </a:solidFill>
+        <a:solidFill>
+          <a:schemeClr val="phClr">
+            <a:tint val="95000"/>
+            <a:satMod val="170000"/>
+          </a:schemeClr>
+        </a:solidFill>
+        <a:gradFill rotWithShape="1">
+          <a:gsLst>
+            <a:gs pos="0">
+              <a:schemeClr val="phClr">
+                <a:tint val="93000"/>
+                <a:satMod val="150000"/>
+                <a:shade val="98000"/>
+                <a:lumMod val="102000"/>
+              </a:schemeClr>
+            </a:gs>
+            <a:gs pos="50000">
+              <a:schemeClr val="phClr">
+                <a:tint val="98000"/>
+                <a:satMod val="130000"/>
+                <a:shade val="90000"/>
+                <a:lumMod val="103000"/>
+              </a:schemeClr>
+            </a:gs>
+            <a:gs pos="100000">
+              <a:schemeClr val="phClr">
+                <a:shade val="63000"/>
+                <a:satMod val="120000"/>
+              </a:schemeClr>
+            </a:gs>
+          </a:gsLst>
+          <a:lin ang="5400000" scaled="0"/>
+        </a:gradFill>
+      </a:bgFillStyleLst>
+    </a:fmtScheme>
+  </a:themeElements>
+  <a:objectDefaults>
+    <a:lnDef>
+      <a:spPr/>
+      <a:bodyPr/>
+      <a:lstStyle/>
+      <a:style>
+        <a:lnRef idx="2">
+          <a:schemeClr val="accent1"/>
+        </a:lnRef>
+        <a:fillRef idx="0">
+          <a:schemeClr val="accent1"/>
+        </a:fillRef>
+        <a:effectRef idx="1">
+          <a:schemeClr val="accent1"/>
+        </a:effectRef>
+        <a:fontRef idx="minor">
+          <a:schemeClr val="tx1"/>
+        </a:fontRef>
+      </a:style>
+    </a:lnDef>
+  </a:objectDefaults>
+  <a:extraClrSchemeLst/>
+  <a:extLst>
+    <a:ext uri="{05A4C25C-085E-4340-85A3-A5531E510DB2}">
+      <thm15:themeFamily xmlns:thm15="http://schemas.microsoft.com/office/thememl/2012/main" name="Office Theme" id="{2E142A2C-CD16-42D6-873A-C26D2A0506FA}" vid="{1BDDFF52-6CD6-40A5-AB3C-68EB2F1E4D0A}"/>
+    </a:ext>
+  </a:extLst>
+</a:theme>
 </file>